--- a/.codex-finalizer-v2/candidate-v2.pptx
+++ b/.codex-finalizer-v2/candidate-v2.pptx
@@ -2,25 +2,25 @@
 <file path=ppt/presentation.xml><?xml version="1.0" encoding="utf-8"?>
 <p:presentation xmlns:p="http://schemas.openxmlformats.org/presentationml/2006/main">
   <p:sldMasterIdLst>
-    <p:sldMasterId xmlns:r="http://schemas.openxmlformats.org/officeDocument/2006/relationships" id="2147483648" r:id="R75cc269c496e49e6"/>
+    <p:sldMasterId xmlns:r="http://schemas.openxmlformats.org/officeDocument/2006/relationships" id="2147483648" r:id="R797131a60c6249ac"/>
   </p:sldMasterIdLst>
   <p:notesMasterIdLst>
-    <p:notesMasterId xmlns:r="http://schemas.openxmlformats.org/officeDocument/2006/relationships" r:id="Ra28bbbbc0d6d4de1"/>
+    <p:notesMasterId xmlns:r="http://schemas.openxmlformats.org/officeDocument/2006/relationships" r:id="R1d8a787ee7ff4105"/>
   </p:notesMasterIdLst>
   <p:sldIdLst>
-    <p:sldId xmlns:r="http://schemas.openxmlformats.org/officeDocument/2006/relationships" id="256" r:id="R22bbac9e732e4d11"/>
-    <p:sldId xmlns:r="http://schemas.openxmlformats.org/officeDocument/2006/relationships" id="257" r:id="R2cf2735dc69846d2"/>
-    <p:sldId xmlns:r="http://schemas.openxmlformats.org/officeDocument/2006/relationships" id="258" r:id="Rf4e50fa28ed34e08"/>
-    <p:sldId xmlns:r="http://schemas.openxmlformats.org/officeDocument/2006/relationships" id="259" r:id="Ra6baebd37b2641a8"/>
-    <p:sldId xmlns:r="http://schemas.openxmlformats.org/officeDocument/2006/relationships" id="260" r:id="R9190e8d7ea184446"/>
-    <p:sldId xmlns:r="http://schemas.openxmlformats.org/officeDocument/2006/relationships" id="261" r:id="R92b5e2b155db4758"/>
-    <p:sldId xmlns:r="http://schemas.openxmlformats.org/officeDocument/2006/relationships" id="262" r:id="R698a9e4ce9d44c0b"/>
-    <p:sldId xmlns:r="http://schemas.openxmlformats.org/officeDocument/2006/relationships" id="263" r:id="Rea4009a42b364c4b"/>
-    <p:sldId xmlns:r="http://schemas.openxmlformats.org/officeDocument/2006/relationships" id="264" r:id="R7ce15aedecb74dbf"/>
-    <p:sldId xmlns:r="http://schemas.openxmlformats.org/officeDocument/2006/relationships" id="265" r:id="R69ead3f67abd4ef8"/>
-    <p:sldId xmlns:r="http://schemas.openxmlformats.org/officeDocument/2006/relationships" id="266" r:id="Rc4efbcb227094d5a"/>
-    <p:sldId xmlns:r="http://schemas.openxmlformats.org/officeDocument/2006/relationships" id="267" r:id="R86b2ecacfe95416b"/>
-    <p:sldId xmlns:r="http://schemas.openxmlformats.org/officeDocument/2006/relationships" id="268" r:id="R81e6690aa8504482"/>
+    <p:sldId xmlns:r="http://schemas.openxmlformats.org/officeDocument/2006/relationships" id="256" r:id="R74aadb503dc5449c"/>
+    <p:sldId xmlns:r="http://schemas.openxmlformats.org/officeDocument/2006/relationships" id="257" r:id="R5eaa20ddebb04c51"/>
+    <p:sldId xmlns:r="http://schemas.openxmlformats.org/officeDocument/2006/relationships" id="258" r:id="Rcfed95ede95242e9"/>
+    <p:sldId xmlns:r="http://schemas.openxmlformats.org/officeDocument/2006/relationships" id="259" r:id="R9d1aeb8d91584a29"/>
+    <p:sldId xmlns:r="http://schemas.openxmlformats.org/officeDocument/2006/relationships" id="260" r:id="R626bbd2d62ca47b0"/>
+    <p:sldId xmlns:r="http://schemas.openxmlformats.org/officeDocument/2006/relationships" id="261" r:id="Ra9709ce4d418488b"/>
+    <p:sldId xmlns:r="http://schemas.openxmlformats.org/officeDocument/2006/relationships" id="262" r:id="Rd8c2542c504c48e5"/>
+    <p:sldId xmlns:r="http://schemas.openxmlformats.org/officeDocument/2006/relationships" id="263" r:id="R0a7f6d71a2bc40ff"/>
+    <p:sldId xmlns:r="http://schemas.openxmlformats.org/officeDocument/2006/relationships" id="264" r:id="R93f0e0096c334d4e"/>
+    <p:sldId xmlns:r="http://schemas.openxmlformats.org/officeDocument/2006/relationships" id="265" r:id="R98ef6c6378924eae"/>
+    <p:sldId xmlns:r="http://schemas.openxmlformats.org/officeDocument/2006/relationships" id="266" r:id="R0d45dae9c4044768"/>
+    <p:sldId xmlns:r="http://schemas.openxmlformats.org/officeDocument/2006/relationships" id="267" r:id="R238f9da7e7634782"/>
+    <p:sldId xmlns:r="http://schemas.openxmlformats.org/officeDocument/2006/relationships" id="268" r:id="R8e8cb729dbd440d9"/>
   </p:sldIdLst>
   <p:sldSz cx="9144000" cy="5143500"/>
   <p:notesSz cx="6858000" cy="9144000"/>
@@ -936,7 +936,7 @@
           <a:lstStyle xmlns:a="http://schemas.openxmlformats.org/drawingml/2006/main"/>
           <a:p xmlns:a="http://schemas.openxmlformats.org/drawingml/2006/main">
             <a:r>
-              <a:t>研究范围由用户确认：医院数据仅作后续实验验证，项目重点是公开数据集上的性能提升。 </a:t>
+              <a:t>通俗解释：第一，模型可能利用采集条件判断数据集来源。第二，同一被试的片段不能同时进入训练集和测试集。第三，临床评价单位是患者，因此主要报告患者级指标。医院数据仅作后续实验验证。 </a:t>
             </a:r>
           </a:p>
         </p:txBody>
@@ -1346,7 +1346,7 @@
   </p:cSld>
   <p:clrMap bg1="lt1" tx1="dk1" bg2="lt2" tx2="dk2" accent1="accent1" accent2="accent2" accent3="accent3" accent4="accent4" accent5="accent5" accent6="accent6" hlink="hlink" folHlink="folHlink"/>
   <p:sldLayoutIdLst>
-    <p:sldLayoutId xmlns:r="http://schemas.openxmlformats.org/officeDocument/2006/relationships" id="2147483649" r:id="R6883d8acdf4d47e0"/>
+    <p:sldLayoutId xmlns:r="http://schemas.openxmlformats.org/officeDocument/2006/relationships" id="2147483649" r:id="R716dc90bc50344c5"/>
   </p:sldLayoutIdLst>
   <p:txStyles>
     <p:titleStyle>
@@ -2118,7 +2118,7 @@
           <p:cNvPr id="11" name="">
             <a:extLst xmlns:a="http://schemas.openxmlformats.org/drawingml/2006/main">
               <a:ext uri="{FF2B5EF4-FFF2-40B4-BE49-F238E27FC236}">
-                <a16:creationId xmlns:a16="http://schemas.microsoft.com/office/drawing/2014/main" id="{2670D4F7-35BA-4018-97C6-6AE422AAC26C}"/>
+                <a16:creationId xmlns:a16="http://schemas.microsoft.com/office/drawing/2014/main" id="{BD97D0D4-47DB-488D-BAC8-839E45611E5B}"/>
               </a:ext>
             </a:extLst>
           </p:cNvPr>
@@ -2148,7 +2148,7 @@
           <p:cNvPr id="2" name="">
             <a:extLst xmlns:a="http://schemas.openxmlformats.org/drawingml/2006/main">
               <a:ext uri="{FF2B5EF4-FFF2-40B4-BE49-F238E27FC236}">
-                <a16:creationId xmlns:a16="http://schemas.microsoft.com/office/drawing/2014/main" id="{6113F2D7-CB67-425E-83FB-8417719A9AC8}"/>
+                <a16:creationId xmlns:a16="http://schemas.microsoft.com/office/drawing/2014/main" id="{58FA782B-BF0D-4F2B-981B-FF8B717E7AC0}"/>
               </a:ext>
             </a:extLst>
           </p:cNvPr>
@@ -2178,7 +2178,7 @@
           <p:cNvPr id="3" name="">
             <a:extLst xmlns:a="http://schemas.openxmlformats.org/drawingml/2006/main">
               <a:ext uri="{FF2B5EF4-FFF2-40B4-BE49-F238E27FC236}">
-                <a16:creationId xmlns:a16="http://schemas.microsoft.com/office/drawing/2014/main" id="{84715476-D86C-4B67-8BB8-C701B819C3D5}"/>
+                <a16:creationId xmlns:a16="http://schemas.microsoft.com/office/drawing/2014/main" id="{01BD237D-9CBE-4269-AD99-001FEA18AB29}"/>
               </a:ext>
             </a:extLst>
           </p:cNvPr>
@@ -2208,7 +2208,7 @@
           <p:cNvPr id="4" name="">
             <a:extLst xmlns:a="http://schemas.openxmlformats.org/drawingml/2006/main">
               <a:ext uri="{FF2B5EF4-FFF2-40B4-BE49-F238E27FC236}">
-                <a16:creationId xmlns:a16="http://schemas.microsoft.com/office/drawing/2014/main" id="{EE2A67A7-CC80-4CD1-AF2A-0806CAAE4483}"/>
+                <a16:creationId xmlns:a16="http://schemas.microsoft.com/office/drawing/2014/main" id="{2EE72758-F8CC-4450-8B56-89547E73DBE8}"/>
               </a:ext>
             </a:extLst>
           </p:cNvPr>
@@ -2238,7 +2238,7 @@
           <p:cNvPr id="5" name="">
             <a:extLst xmlns:a="http://schemas.openxmlformats.org/drawingml/2006/main">
               <a:ext uri="{FF2B5EF4-FFF2-40B4-BE49-F238E27FC236}">
-                <a16:creationId xmlns:a16="http://schemas.microsoft.com/office/drawing/2014/main" id="{80074FD8-AE98-4132-98C7-526065E22EA9}"/>
+                <a16:creationId xmlns:a16="http://schemas.microsoft.com/office/drawing/2014/main" id="{87720338-643A-4306-AD2B-01D6586C3BDC}"/>
               </a:ext>
             </a:extLst>
           </p:cNvPr>
@@ -2318,7 +2318,7 @@
           <p:cNvPr id="6" name="">
             <a:extLst xmlns:a="http://schemas.openxmlformats.org/drawingml/2006/main">
               <a:ext uri="{FF2B5EF4-FFF2-40B4-BE49-F238E27FC236}">
-                <a16:creationId xmlns:a16="http://schemas.microsoft.com/office/drawing/2014/main" id="{4AD31D28-999C-4873-9DE4-D54042A20848}"/>
+                <a16:creationId xmlns:a16="http://schemas.microsoft.com/office/drawing/2014/main" id="{50640491-E5A2-42F4-AFE7-3A344F122589}"/>
               </a:ext>
             </a:extLst>
           </p:cNvPr>
@@ -2375,7 +2375,7 @@
           <p:cNvPr id="7" name="">
             <a:extLst xmlns:a="http://schemas.openxmlformats.org/drawingml/2006/main">
               <a:ext uri="{FF2B5EF4-FFF2-40B4-BE49-F238E27FC236}">
-                <a16:creationId xmlns:a16="http://schemas.microsoft.com/office/drawing/2014/main" id="{53BA64FC-4120-4118-8D7C-655ADB2E44A5}"/>
+                <a16:creationId xmlns:a16="http://schemas.microsoft.com/office/drawing/2014/main" id="{1B5E4E24-1606-4705-8D75-76352EAC0773}"/>
               </a:ext>
             </a:extLst>
           </p:cNvPr>
@@ -2432,7 +2432,7 @@
           <p:cNvPr id="8" name="">
             <a:extLst xmlns:a="http://schemas.openxmlformats.org/drawingml/2006/main">
               <a:ext uri="{FF2B5EF4-FFF2-40B4-BE49-F238E27FC236}">
-                <a16:creationId xmlns:a16="http://schemas.microsoft.com/office/drawing/2014/main" id="{C01AB627-81AA-4C8B-9AE5-0B0E2A904763}"/>
+                <a16:creationId xmlns:a16="http://schemas.microsoft.com/office/drawing/2014/main" id="{2A36B6C2-D3E3-4B01-818C-AD4B5D28BE82}"/>
               </a:ext>
             </a:extLst>
           </p:cNvPr>
@@ -2489,7 +2489,7 @@
           <p:cNvPr id="9" name="">
             <a:extLst xmlns:a="http://schemas.openxmlformats.org/drawingml/2006/main">
               <a:ext uri="{FF2B5EF4-FFF2-40B4-BE49-F238E27FC236}">
-                <a16:creationId xmlns:a16="http://schemas.microsoft.com/office/drawing/2014/main" id="{CE144A49-807E-40FB-BB90-7CECB25A48C5}"/>
+                <a16:creationId xmlns:a16="http://schemas.microsoft.com/office/drawing/2014/main" id="{AE1B1496-1200-480C-9D16-175B6545B041}"/>
               </a:ext>
             </a:extLst>
           </p:cNvPr>
@@ -2519,7 +2519,7 @@
           <p:cNvPr id="10" name="">
             <a:extLst xmlns:a="http://schemas.openxmlformats.org/drawingml/2006/main">
               <a:ext uri="{FF2B5EF4-FFF2-40B4-BE49-F238E27FC236}">
-                <a16:creationId xmlns:a16="http://schemas.microsoft.com/office/drawing/2014/main" id="{E01E19F7-052C-4AAB-AF57-AEE4939547FC}"/>
+                <a16:creationId xmlns:a16="http://schemas.microsoft.com/office/drawing/2014/main" id="{74FCA55E-5BF7-43F5-B553-F60C8EA77C28}"/>
               </a:ext>
             </a:extLst>
           </p:cNvPr>
@@ -2574,7 +2574,7 @@
     </p:spTree>
     <p:extLst>
       <p:ext uri="{BB962C8B-B14F-4D97-AF65-F5344CB8AC3E}">
-        <p14:creationId xmlns:p14="http://schemas.microsoft.com/office/powerpoint/2010/main" val="2088351498"/>
+        <p14:creationId xmlns:p14="http://schemas.microsoft.com/office/powerpoint/2010/main" val="365056319"/>
       </p:ext>
     </p:extLst>
   </p:cSld>
@@ -2605,7 +2605,7 @@
           <p:cNvPr id="13" name="">
             <a:extLst xmlns:a="http://schemas.openxmlformats.org/drawingml/2006/main">
               <a:ext uri="{FF2B5EF4-FFF2-40B4-BE49-F238E27FC236}">
-                <a16:creationId xmlns:a16="http://schemas.microsoft.com/office/drawing/2014/main" id="{EF31B6C4-FF4C-4AF7-B4A6-59CE617F029B}"/>
+                <a16:creationId xmlns:a16="http://schemas.microsoft.com/office/drawing/2014/main" id="{271F78B1-2976-4659-AD41-FB03539150C4}"/>
               </a:ext>
             </a:extLst>
           </p:cNvPr>
@@ -2635,7 +2635,7 @@
           <p:cNvPr id="2" name="">
             <a:extLst xmlns:a="http://schemas.openxmlformats.org/drawingml/2006/main">
               <a:ext uri="{FF2B5EF4-FFF2-40B4-BE49-F238E27FC236}">
-                <a16:creationId xmlns:a16="http://schemas.microsoft.com/office/drawing/2014/main" id="{5736B128-6440-43B6-9C55-B6197A543829}"/>
+                <a16:creationId xmlns:a16="http://schemas.microsoft.com/office/drawing/2014/main" id="{BAA06824-5B79-45CE-AAA0-75445573DCAF}"/>
               </a:ext>
             </a:extLst>
           </p:cNvPr>
@@ -2665,7 +2665,7 @@
           <p:cNvPr id="3" name="">
             <a:extLst xmlns:a="http://schemas.openxmlformats.org/drawingml/2006/main">
               <a:ext uri="{FF2B5EF4-FFF2-40B4-BE49-F238E27FC236}">
-                <a16:creationId xmlns:a16="http://schemas.microsoft.com/office/drawing/2014/main" id="{8097EB67-B241-4E7B-B462-6DFB8E3C52A3}"/>
+                <a16:creationId xmlns:a16="http://schemas.microsoft.com/office/drawing/2014/main" id="{DE683F99-BA30-43F4-96E2-8A746FA4A4CE}"/>
               </a:ext>
             </a:extLst>
           </p:cNvPr>
@@ -2695,7 +2695,7 @@
           <p:cNvPr id="4" name="">
             <a:extLst xmlns:a="http://schemas.openxmlformats.org/drawingml/2006/main">
               <a:ext uri="{FF2B5EF4-FFF2-40B4-BE49-F238E27FC236}">
-                <a16:creationId xmlns:a16="http://schemas.microsoft.com/office/drawing/2014/main" id="{924E4781-350E-4DC5-A330-FA83A68E54DE}"/>
+                <a16:creationId xmlns:a16="http://schemas.microsoft.com/office/drawing/2014/main" id="{0F2E11C8-6B97-451A-B91A-80EBD1112963}"/>
               </a:ext>
             </a:extLst>
           </p:cNvPr>
@@ -2759,7 +2759,7 @@
         </p:xfrm>
         <a:graphic xmlns:a="http://schemas.openxmlformats.org/drawingml/2006/main">
           <a:graphicData uri="http://schemas.openxmlformats.org/drawingml/2006/chart">
-            <c:chart xmlns:r="http://schemas.openxmlformats.org/officeDocument/2006/relationships" xmlns:c="http://schemas.openxmlformats.org/drawingml/2006/chart" r:id="Rdafda71e5867410f"/>
+            <c:chart xmlns:r="http://schemas.openxmlformats.org/officeDocument/2006/relationships" xmlns:c="http://schemas.openxmlformats.org/drawingml/2006/chart" r:id="R740f247dd6784983"/>
           </a:graphicData>
         </a:graphic>
       </p:graphicFrame>
@@ -2768,7 +2768,7 @@
           <p:cNvPr id="6" name="">
             <a:extLst xmlns:a="http://schemas.openxmlformats.org/drawingml/2006/main">
               <a:ext uri="{FF2B5EF4-FFF2-40B4-BE49-F238E27FC236}">
-                <a16:creationId xmlns:a16="http://schemas.microsoft.com/office/drawing/2014/main" id="{01CB934F-5106-4630-A093-1E3617EF42CE}"/>
+                <a16:creationId xmlns:a16="http://schemas.microsoft.com/office/drawing/2014/main" id="{4AB23C72-B3A2-48A9-B121-781BACDBE001}"/>
               </a:ext>
             </a:extLst>
           </p:cNvPr>
@@ -2825,7 +2825,7 @@
           <p:cNvPr id="7" name="">
             <a:extLst xmlns:a="http://schemas.openxmlformats.org/drawingml/2006/main">
               <a:ext uri="{FF2B5EF4-FFF2-40B4-BE49-F238E27FC236}">
-                <a16:creationId xmlns:a16="http://schemas.microsoft.com/office/drawing/2014/main" id="{1ADC5454-45B6-4B90-8997-5A201EA3D04F}"/>
+                <a16:creationId xmlns:a16="http://schemas.microsoft.com/office/drawing/2014/main" id="{B8036210-BD19-484D-9329-F425E290AE65}"/>
               </a:ext>
             </a:extLst>
           </p:cNvPr>
@@ -2940,7 +2940,7 @@
           <p:cNvPr id="8" name="">
             <a:extLst xmlns:a="http://schemas.openxmlformats.org/drawingml/2006/main">
               <a:ext uri="{FF2B5EF4-FFF2-40B4-BE49-F238E27FC236}">
-                <a16:creationId xmlns:a16="http://schemas.microsoft.com/office/drawing/2014/main" id="{9D62D897-539E-4FD5-9F54-87E21DFD4FF5}"/>
+                <a16:creationId xmlns:a16="http://schemas.microsoft.com/office/drawing/2014/main" id="{3BD6E37B-B5E4-4E9D-8EDE-4E2CA5EAB464}"/>
               </a:ext>
             </a:extLst>
           </p:cNvPr>
@@ -2997,7 +2997,7 @@
           <p:cNvPr id="9" name="">
             <a:extLst xmlns:a="http://schemas.openxmlformats.org/drawingml/2006/main">
               <a:ext uri="{FF2B5EF4-FFF2-40B4-BE49-F238E27FC236}">
-                <a16:creationId xmlns:a16="http://schemas.microsoft.com/office/drawing/2014/main" id="{673BFC7B-3D82-4E7B-9E94-36B6B387F84A}"/>
+                <a16:creationId xmlns:a16="http://schemas.microsoft.com/office/drawing/2014/main" id="{C0A70942-318E-4D44-BE1A-6A53B18DD318}"/>
               </a:ext>
             </a:extLst>
           </p:cNvPr>
@@ -3112,7 +3112,7 @@
           <p:cNvPr id="10" name="">
             <a:extLst xmlns:a="http://schemas.openxmlformats.org/drawingml/2006/main">
               <a:ext uri="{FF2B5EF4-FFF2-40B4-BE49-F238E27FC236}">
-                <a16:creationId xmlns:a16="http://schemas.microsoft.com/office/drawing/2014/main" id="{E902405F-D5D8-4E5A-9744-F8CD6E7DEB35}"/>
+                <a16:creationId xmlns:a16="http://schemas.microsoft.com/office/drawing/2014/main" id="{BCCE2F60-0F53-4DB1-8BC6-75B8C3B63766}"/>
               </a:ext>
             </a:extLst>
           </p:cNvPr>
@@ -3169,7 +3169,7 @@
           <p:cNvPr id="11" name="">
             <a:extLst xmlns:a="http://schemas.openxmlformats.org/drawingml/2006/main">
               <a:ext uri="{FF2B5EF4-FFF2-40B4-BE49-F238E27FC236}">
-                <a16:creationId xmlns:a16="http://schemas.microsoft.com/office/drawing/2014/main" id="{4293D4E4-1A5C-43F4-983D-74696ADAFEE6}"/>
+                <a16:creationId xmlns:a16="http://schemas.microsoft.com/office/drawing/2014/main" id="{1C82876E-13FC-4B03-A86F-7E96F1233B99}"/>
               </a:ext>
             </a:extLst>
           </p:cNvPr>
@@ -3199,7 +3199,7 @@
           <p:cNvPr id="12" name="">
             <a:extLst xmlns:a="http://schemas.openxmlformats.org/drawingml/2006/main">
               <a:ext uri="{FF2B5EF4-FFF2-40B4-BE49-F238E27FC236}">
-                <a16:creationId xmlns:a16="http://schemas.microsoft.com/office/drawing/2014/main" id="{D05D9843-2736-4093-8464-BC0FFF065E5A}"/>
+                <a16:creationId xmlns:a16="http://schemas.microsoft.com/office/drawing/2014/main" id="{EF548130-7ECD-4286-8EB1-ED5A02B9B968}"/>
               </a:ext>
             </a:extLst>
           </p:cNvPr>
@@ -3254,7 +3254,7 @@
     </p:spTree>
     <p:extLst>
       <p:ext uri="{BB962C8B-B14F-4D97-AF65-F5344CB8AC3E}">
-        <p14:creationId xmlns:p14="http://schemas.microsoft.com/office/powerpoint/2010/main" val="1900967336"/>
+        <p14:creationId xmlns:p14="http://schemas.microsoft.com/office/powerpoint/2010/main" val="49488300"/>
       </p:ext>
     </p:extLst>
   </p:cSld>
@@ -3285,7 +3285,7 @@
           <p:cNvPr id="20" name="">
             <a:extLst xmlns:a="http://schemas.openxmlformats.org/drawingml/2006/main">
               <a:ext uri="{FF2B5EF4-FFF2-40B4-BE49-F238E27FC236}">
-                <a16:creationId xmlns:a16="http://schemas.microsoft.com/office/drawing/2014/main" id="{56900B57-7BA7-48FD-A8D9-A0155EF28A25}"/>
+                <a16:creationId xmlns:a16="http://schemas.microsoft.com/office/drawing/2014/main" id="{92034D30-B1FC-482C-8EF6-FD70A1A20723}"/>
               </a:ext>
             </a:extLst>
           </p:cNvPr>
@@ -3315,7 +3315,7 @@
           <p:cNvPr id="2" name="">
             <a:extLst xmlns:a="http://schemas.openxmlformats.org/drawingml/2006/main">
               <a:ext uri="{FF2B5EF4-FFF2-40B4-BE49-F238E27FC236}">
-                <a16:creationId xmlns:a16="http://schemas.microsoft.com/office/drawing/2014/main" id="{0B84A798-75A2-44FA-A93A-F0799DA51028}"/>
+                <a16:creationId xmlns:a16="http://schemas.microsoft.com/office/drawing/2014/main" id="{97DBDB75-F456-47D3-9FAB-0AD19410DEE0}"/>
               </a:ext>
             </a:extLst>
           </p:cNvPr>
@@ -3345,7 +3345,7 @@
           <p:cNvPr id="3" name="">
             <a:extLst xmlns:a="http://schemas.openxmlformats.org/drawingml/2006/main">
               <a:ext uri="{FF2B5EF4-FFF2-40B4-BE49-F238E27FC236}">
-                <a16:creationId xmlns:a16="http://schemas.microsoft.com/office/drawing/2014/main" id="{E1B71054-00D0-49E4-8123-7D01A6ED4419}"/>
+                <a16:creationId xmlns:a16="http://schemas.microsoft.com/office/drawing/2014/main" id="{1A130C2F-3FEE-4E7A-AFA2-496E4E4F88DA}"/>
               </a:ext>
             </a:extLst>
           </p:cNvPr>
@@ -3375,7 +3375,7 @@
           <p:cNvPr id="4" name="">
             <a:extLst xmlns:a="http://schemas.openxmlformats.org/drawingml/2006/main">
               <a:ext uri="{FF2B5EF4-FFF2-40B4-BE49-F238E27FC236}">
-                <a16:creationId xmlns:a16="http://schemas.microsoft.com/office/drawing/2014/main" id="{09F6DC3D-EE3F-44BE-88D4-7D72B7825321}"/>
+                <a16:creationId xmlns:a16="http://schemas.microsoft.com/office/drawing/2014/main" id="{59834480-A654-4054-A52F-7EFD0D426A7E}"/>
               </a:ext>
             </a:extLst>
           </p:cNvPr>
@@ -3432,7 +3432,7 @@
           <p:cNvPr id="5" name="">
             <a:extLst xmlns:a="http://schemas.openxmlformats.org/drawingml/2006/main">
               <a:ext uri="{FF2B5EF4-FFF2-40B4-BE49-F238E27FC236}">
-                <a16:creationId xmlns:a16="http://schemas.microsoft.com/office/drawing/2014/main" id="{5AD8FDB4-12C3-4B4D-9F13-A5D3E92428D1}"/>
+                <a16:creationId xmlns:a16="http://schemas.microsoft.com/office/drawing/2014/main" id="{D0887864-83DC-4877-9FE5-86787321EB56}"/>
               </a:ext>
             </a:extLst>
           </p:cNvPr>
@@ -3489,7 +3489,7 @@
           <p:cNvPr id="6" name="">
             <a:extLst xmlns:a="http://schemas.openxmlformats.org/drawingml/2006/main">
               <a:ext uri="{FF2B5EF4-FFF2-40B4-BE49-F238E27FC236}">
-                <a16:creationId xmlns:a16="http://schemas.microsoft.com/office/drawing/2014/main" id="{F0B3EF55-C6E3-4713-89A6-534BF7DC8FF6}"/>
+                <a16:creationId xmlns:a16="http://schemas.microsoft.com/office/drawing/2014/main" id="{97B88C86-EDD8-40D5-84B9-649550C74BD3}"/>
               </a:ext>
             </a:extLst>
           </p:cNvPr>
@@ -3546,7 +3546,7 @@
           <p:cNvPr id="7" name="">
             <a:extLst xmlns:a="http://schemas.openxmlformats.org/drawingml/2006/main">
               <a:ext uri="{FF2B5EF4-FFF2-40B4-BE49-F238E27FC236}">
-                <a16:creationId xmlns:a16="http://schemas.microsoft.com/office/drawing/2014/main" id="{B2E2C6D8-25EA-4353-8B93-6697358879C3}"/>
+                <a16:creationId xmlns:a16="http://schemas.microsoft.com/office/drawing/2014/main" id="{30E4405B-FBE3-4D9E-B8E7-D9C2F1B0D0DF}"/>
               </a:ext>
             </a:extLst>
           </p:cNvPr>
@@ -3603,7 +3603,7 @@
           <p:cNvPr id="8" name="">
             <a:extLst xmlns:a="http://schemas.openxmlformats.org/drawingml/2006/main">
               <a:ext uri="{FF2B5EF4-FFF2-40B4-BE49-F238E27FC236}">
-                <a16:creationId xmlns:a16="http://schemas.microsoft.com/office/drawing/2014/main" id="{FBE2738A-FA3E-40DA-BC89-8237654E2A3C}"/>
+                <a16:creationId xmlns:a16="http://schemas.microsoft.com/office/drawing/2014/main" id="{1DED17F9-7DBC-4189-B3FA-C2CAF0BBA1C5}"/>
               </a:ext>
             </a:extLst>
           </p:cNvPr>
@@ -3660,7 +3660,7 @@
           <p:cNvPr id="9" name="">
             <a:extLst xmlns:a="http://schemas.openxmlformats.org/drawingml/2006/main">
               <a:ext uri="{FF2B5EF4-FFF2-40B4-BE49-F238E27FC236}">
-                <a16:creationId xmlns:a16="http://schemas.microsoft.com/office/drawing/2014/main" id="{EEBA29E5-3A74-4C21-A13B-9897327A51BC}"/>
+                <a16:creationId xmlns:a16="http://schemas.microsoft.com/office/drawing/2014/main" id="{079ABEB6-2C2D-4C03-B1A4-C8925B25412C}"/>
               </a:ext>
             </a:extLst>
           </p:cNvPr>
@@ -3717,7 +3717,7 @@
           <p:cNvPr id="10" name="">
             <a:extLst xmlns:a="http://schemas.openxmlformats.org/drawingml/2006/main">
               <a:ext uri="{FF2B5EF4-FFF2-40B4-BE49-F238E27FC236}">
-                <a16:creationId xmlns:a16="http://schemas.microsoft.com/office/drawing/2014/main" id="{47334842-F5B6-42CD-840C-AF0EA3A50A7E}"/>
+                <a16:creationId xmlns:a16="http://schemas.microsoft.com/office/drawing/2014/main" id="{2A05DFEB-99EE-4976-AAAA-EE313223B189}"/>
               </a:ext>
             </a:extLst>
           </p:cNvPr>
@@ -3774,7 +3774,7 @@
           <p:cNvPr id="11" name="">
             <a:extLst xmlns:a="http://schemas.openxmlformats.org/drawingml/2006/main">
               <a:ext uri="{FF2B5EF4-FFF2-40B4-BE49-F238E27FC236}">
-                <a16:creationId xmlns:a16="http://schemas.microsoft.com/office/drawing/2014/main" id="{169AF913-A9D7-4AC9-B2F5-E004FC85F5E9}"/>
+                <a16:creationId xmlns:a16="http://schemas.microsoft.com/office/drawing/2014/main" id="{5E9CDA80-E0A4-4B9B-B725-7C16672EA14B}"/>
               </a:ext>
             </a:extLst>
           </p:cNvPr>
@@ -3831,7 +3831,7 @@
           <p:cNvPr id="12" name="">
             <a:extLst xmlns:a="http://schemas.openxmlformats.org/drawingml/2006/main">
               <a:ext uri="{FF2B5EF4-FFF2-40B4-BE49-F238E27FC236}">
-                <a16:creationId xmlns:a16="http://schemas.microsoft.com/office/drawing/2014/main" id="{E6E070AC-D39E-460F-9060-ABC88C679F9E}"/>
+                <a16:creationId xmlns:a16="http://schemas.microsoft.com/office/drawing/2014/main" id="{78F9B395-C726-4094-9466-BBAF6C4358A2}"/>
               </a:ext>
             </a:extLst>
           </p:cNvPr>
@@ -3888,7 +3888,7 @@
           <p:cNvPr id="13" name="">
             <a:extLst xmlns:a="http://schemas.openxmlformats.org/drawingml/2006/main">
               <a:ext uri="{FF2B5EF4-FFF2-40B4-BE49-F238E27FC236}">
-                <a16:creationId xmlns:a16="http://schemas.microsoft.com/office/drawing/2014/main" id="{EFB487AE-1548-4675-8F04-4AF4411BCA7F}"/>
+                <a16:creationId xmlns:a16="http://schemas.microsoft.com/office/drawing/2014/main" id="{87DDCAAD-2108-40F2-A4A8-B84662565821}"/>
               </a:ext>
             </a:extLst>
           </p:cNvPr>
@@ -3945,7 +3945,7 @@
           <p:cNvPr id="14" name="">
             <a:extLst xmlns:a="http://schemas.openxmlformats.org/drawingml/2006/main">
               <a:ext uri="{FF2B5EF4-FFF2-40B4-BE49-F238E27FC236}">
-                <a16:creationId xmlns:a16="http://schemas.microsoft.com/office/drawing/2014/main" id="{9CD15CAC-4233-406E-989C-A1AA4BC995D4}"/>
+                <a16:creationId xmlns:a16="http://schemas.microsoft.com/office/drawing/2014/main" id="{A3BCFD7D-C204-41EA-8066-690B40577072}"/>
               </a:ext>
             </a:extLst>
           </p:cNvPr>
@@ -3975,7 +3975,7 @@
           <p:cNvPr id="15" name="">
             <a:extLst xmlns:a="http://schemas.openxmlformats.org/drawingml/2006/main">
               <a:ext uri="{FF2B5EF4-FFF2-40B4-BE49-F238E27FC236}">
-                <a16:creationId xmlns:a16="http://schemas.microsoft.com/office/drawing/2014/main" id="{9ACCE470-C2C9-4626-BE06-0A2AD80FB0D7}"/>
+                <a16:creationId xmlns:a16="http://schemas.microsoft.com/office/drawing/2014/main" id="{6D235D23-87F9-4D0A-97C5-6B9E4285D290}"/>
               </a:ext>
             </a:extLst>
           </p:cNvPr>
@@ -4032,7 +4032,7 @@
           <p:cNvPr id="16" name="">
             <a:extLst xmlns:a="http://schemas.openxmlformats.org/drawingml/2006/main">
               <a:ext uri="{FF2B5EF4-FFF2-40B4-BE49-F238E27FC236}">
-                <a16:creationId xmlns:a16="http://schemas.microsoft.com/office/drawing/2014/main" id="{5B76E00A-8BBD-49D3-A562-1C77E75A676F}"/>
+                <a16:creationId xmlns:a16="http://schemas.microsoft.com/office/drawing/2014/main" id="{6B2A7392-1BF3-4020-8FEA-C2F857FC6068}"/>
               </a:ext>
             </a:extLst>
           </p:cNvPr>
@@ -4089,7 +4089,7 @@
           <p:cNvPr id="17" name="">
             <a:extLst xmlns:a="http://schemas.openxmlformats.org/drawingml/2006/main">
               <a:ext uri="{FF2B5EF4-FFF2-40B4-BE49-F238E27FC236}">
-                <a16:creationId xmlns:a16="http://schemas.microsoft.com/office/drawing/2014/main" id="{E5CC5BB0-1021-42AF-89A9-8925E479C22A}"/>
+                <a16:creationId xmlns:a16="http://schemas.microsoft.com/office/drawing/2014/main" id="{94FDA4A0-684C-4981-BAFF-AC3812A5BD4E}"/>
               </a:ext>
             </a:extLst>
           </p:cNvPr>
@@ -4146,7 +4146,7 @@
           <p:cNvPr id="18" name="">
             <a:extLst xmlns:a="http://schemas.openxmlformats.org/drawingml/2006/main">
               <a:ext uri="{FF2B5EF4-FFF2-40B4-BE49-F238E27FC236}">
-                <a16:creationId xmlns:a16="http://schemas.microsoft.com/office/drawing/2014/main" id="{395E7EE4-F38F-4299-BD1E-A4897E02A0A8}"/>
+                <a16:creationId xmlns:a16="http://schemas.microsoft.com/office/drawing/2014/main" id="{D10749E6-CEAF-455C-8210-AEC32F93BC45}"/>
               </a:ext>
             </a:extLst>
           </p:cNvPr>
@@ -4176,7 +4176,7 @@
           <p:cNvPr id="19" name="">
             <a:extLst xmlns:a="http://schemas.openxmlformats.org/drawingml/2006/main">
               <a:ext uri="{FF2B5EF4-FFF2-40B4-BE49-F238E27FC236}">
-                <a16:creationId xmlns:a16="http://schemas.microsoft.com/office/drawing/2014/main" id="{A9535573-F230-4B0A-A8D2-1B0173FF82FB}"/>
+                <a16:creationId xmlns:a16="http://schemas.microsoft.com/office/drawing/2014/main" id="{41F4D8FC-F981-4846-8040-43260E209217}"/>
               </a:ext>
             </a:extLst>
           </p:cNvPr>
@@ -4231,7 +4231,7 @@
     </p:spTree>
     <p:extLst>
       <p:ext uri="{BB962C8B-B14F-4D97-AF65-F5344CB8AC3E}">
-        <p14:creationId xmlns:p14="http://schemas.microsoft.com/office/powerpoint/2010/main" val="1864467406"/>
+        <p14:creationId xmlns:p14="http://schemas.microsoft.com/office/powerpoint/2010/main" val="509529365"/>
       </p:ext>
     </p:extLst>
   </p:cSld>
@@ -4262,7 +4262,7 @@
           <p:cNvPr id="34" name="">
             <a:extLst xmlns:a="http://schemas.openxmlformats.org/drawingml/2006/main">
               <a:ext uri="{FF2B5EF4-FFF2-40B4-BE49-F238E27FC236}">
-                <a16:creationId xmlns:a16="http://schemas.microsoft.com/office/drawing/2014/main" id="{D689FE1E-3D27-469B-82A0-DAB8E44F6629}"/>
+                <a16:creationId xmlns:a16="http://schemas.microsoft.com/office/drawing/2014/main" id="{C78AB02F-081A-4E9D-9B99-53E4850E2921}"/>
               </a:ext>
             </a:extLst>
           </p:cNvPr>
@@ -4292,7 +4292,7 @@
           <p:cNvPr id="2" name="">
             <a:extLst xmlns:a="http://schemas.openxmlformats.org/drawingml/2006/main">
               <a:ext uri="{FF2B5EF4-FFF2-40B4-BE49-F238E27FC236}">
-                <a16:creationId xmlns:a16="http://schemas.microsoft.com/office/drawing/2014/main" id="{2805B6EA-9849-4F0D-B0D4-A87AB5B27BDF}"/>
+                <a16:creationId xmlns:a16="http://schemas.microsoft.com/office/drawing/2014/main" id="{E9262163-A523-4041-8F0C-B09092D81F3F}"/>
               </a:ext>
             </a:extLst>
           </p:cNvPr>
@@ -4322,7 +4322,7 @@
           <p:cNvPr id="3" name="">
             <a:extLst xmlns:a="http://schemas.openxmlformats.org/drawingml/2006/main">
               <a:ext uri="{FF2B5EF4-FFF2-40B4-BE49-F238E27FC236}">
-                <a16:creationId xmlns:a16="http://schemas.microsoft.com/office/drawing/2014/main" id="{64D85CA8-5C35-4B30-890C-D2AD232657BF}"/>
+                <a16:creationId xmlns:a16="http://schemas.microsoft.com/office/drawing/2014/main" id="{80AB4300-F2EB-4853-A00B-9507C49AFEDC}"/>
               </a:ext>
             </a:extLst>
           </p:cNvPr>
@@ -4352,7 +4352,7 @@
           <p:cNvPr id="4" name="">
             <a:extLst xmlns:a="http://schemas.openxmlformats.org/drawingml/2006/main">
               <a:ext uri="{FF2B5EF4-FFF2-40B4-BE49-F238E27FC236}">
-                <a16:creationId xmlns:a16="http://schemas.microsoft.com/office/drawing/2014/main" id="{E05A4490-CDB1-4C71-8E7E-6957E8D55F17}"/>
+                <a16:creationId xmlns:a16="http://schemas.microsoft.com/office/drawing/2014/main" id="{A1663BB0-DA2A-4EE5-BC2F-A241119D7251}"/>
               </a:ext>
             </a:extLst>
           </p:cNvPr>
@@ -4409,7 +4409,7 @@
           <p:cNvPr id="5" name="">
             <a:extLst xmlns:a="http://schemas.openxmlformats.org/drawingml/2006/main">
               <a:ext uri="{FF2B5EF4-FFF2-40B4-BE49-F238E27FC236}">
-                <a16:creationId xmlns:a16="http://schemas.microsoft.com/office/drawing/2014/main" id="{E645A8AF-38C1-48B6-85EF-1028FFAE61EA}"/>
+                <a16:creationId xmlns:a16="http://schemas.microsoft.com/office/drawing/2014/main" id="{A0A01A1E-D003-482E-9211-2AFEAA7D0AB4}"/>
               </a:ext>
             </a:extLst>
           </p:cNvPr>
@@ -4466,7 +4466,7 @@
           <p:cNvPr id="6" name="">
             <a:extLst xmlns:a="http://schemas.openxmlformats.org/drawingml/2006/main">
               <a:ext uri="{FF2B5EF4-FFF2-40B4-BE49-F238E27FC236}">
-                <a16:creationId xmlns:a16="http://schemas.microsoft.com/office/drawing/2014/main" id="{339A454C-128A-496E-B4DF-CCE0BE6D285D}"/>
+                <a16:creationId xmlns:a16="http://schemas.microsoft.com/office/drawing/2014/main" id="{275EDA9D-223C-472C-B32E-D23CACC362B0}"/>
               </a:ext>
             </a:extLst>
           </p:cNvPr>
@@ -4496,7 +4496,7 @@
           <p:cNvPr id="7" name="">
             <a:extLst xmlns:a="http://schemas.openxmlformats.org/drawingml/2006/main">
               <a:ext uri="{FF2B5EF4-FFF2-40B4-BE49-F238E27FC236}">
-                <a16:creationId xmlns:a16="http://schemas.microsoft.com/office/drawing/2014/main" id="{BC4878BB-6B2A-4ADA-B952-A3D0920D36C8}"/>
+                <a16:creationId xmlns:a16="http://schemas.microsoft.com/office/drawing/2014/main" id="{9E847F73-267A-45A0-823B-F2500B2EB39A}"/>
               </a:ext>
             </a:extLst>
           </p:cNvPr>
@@ -4553,7 +4553,7 @@
           <p:cNvPr id="8" name="">
             <a:extLst xmlns:a="http://schemas.openxmlformats.org/drawingml/2006/main">
               <a:ext uri="{FF2B5EF4-FFF2-40B4-BE49-F238E27FC236}">
-                <a16:creationId xmlns:a16="http://schemas.microsoft.com/office/drawing/2014/main" id="{C3AC896C-437A-411F-AB61-C5F81944737E}"/>
+                <a16:creationId xmlns:a16="http://schemas.microsoft.com/office/drawing/2014/main" id="{34C67E78-E39A-4C4C-A1B2-9F7ABB0633B9}"/>
               </a:ext>
             </a:extLst>
           </p:cNvPr>
@@ -4633,7 +4633,7 @@
           <p:cNvPr id="9" name="">
             <a:extLst xmlns:a="http://schemas.openxmlformats.org/drawingml/2006/main">
               <a:ext uri="{FF2B5EF4-FFF2-40B4-BE49-F238E27FC236}">
-                <a16:creationId xmlns:a16="http://schemas.microsoft.com/office/drawing/2014/main" id="{4BAB2CD4-1202-4CEC-8B97-1E6C6B41E30D}"/>
+                <a16:creationId xmlns:a16="http://schemas.microsoft.com/office/drawing/2014/main" id="{C19FC722-E327-44B7-8A78-9EB7F9E5B5A3}"/>
               </a:ext>
             </a:extLst>
           </p:cNvPr>
@@ -4690,7 +4690,7 @@
           <p:cNvPr id="10" name="">
             <a:extLst xmlns:a="http://schemas.openxmlformats.org/drawingml/2006/main">
               <a:ext uri="{FF2B5EF4-FFF2-40B4-BE49-F238E27FC236}">
-                <a16:creationId xmlns:a16="http://schemas.microsoft.com/office/drawing/2014/main" id="{1E460100-C379-462C-AD19-220B25C6588A}"/>
+                <a16:creationId xmlns:a16="http://schemas.microsoft.com/office/drawing/2014/main" id="{DE6C53EC-8F48-48EF-B40F-C21563CCF073}"/>
               </a:ext>
             </a:extLst>
           </p:cNvPr>
@@ -4747,7 +4747,7 @@
           <p:cNvPr id="11" name="">
             <a:extLst xmlns:a="http://schemas.openxmlformats.org/drawingml/2006/main">
               <a:ext uri="{FF2B5EF4-FFF2-40B4-BE49-F238E27FC236}">
-                <a16:creationId xmlns:a16="http://schemas.microsoft.com/office/drawing/2014/main" id="{A9A8C17C-AA4C-4068-BD7D-B47E116D5E33}"/>
+                <a16:creationId xmlns:a16="http://schemas.microsoft.com/office/drawing/2014/main" id="{529D92C6-338E-460F-8C16-C635A720B490}"/>
               </a:ext>
             </a:extLst>
           </p:cNvPr>
@@ -4777,7 +4777,7 @@
           <p:cNvPr id="12" name="">
             <a:extLst xmlns:a="http://schemas.openxmlformats.org/drawingml/2006/main">
               <a:ext uri="{FF2B5EF4-FFF2-40B4-BE49-F238E27FC236}">
-                <a16:creationId xmlns:a16="http://schemas.microsoft.com/office/drawing/2014/main" id="{66E96862-35BA-46BC-8F19-F3EA007EA581}"/>
+                <a16:creationId xmlns:a16="http://schemas.microsoft.com/office/drawing/2014/main" id="{622BDA44-1B9C-441A-A2E2-EBC2E6626E39}"/>
               </a:ext>
             </a:extLst>
           </p:cNvPr>
@@ -4834,7 +4834,7 @@
           <p:cNvPr id="13" name="">
             <a:extLst xmlns:a="http://schemas.openxmlformats.org/drawingml/2006/main">
               <a:ext uri="{FF2B5EF4-FFF2-40B4-BE49-F238E27FC236}">
-                <a16:creationId xmlns:a16="http://schemas.microsoft.com/office/drawing/2014/main" id="{74B6D367-C1A0-4735-B53E-D4F42169FD5B}"/>
+                <a16:creationId xmlns:a16="http://schemas.microsoft.com/office/drawing/2014/main" id="{0AC75672-2FB9-40E4-A05D-3D654E98E9AA}"/>
               </a:ext>
             </a:extLst>
           </p:cNvPr>
@@ -4914,7 +4914,7 @@
           <p:cNvPr id="14" name="">
             <a:extLst xmlns:a="http://schemas.openxmlformats.org/drawingml/2006/main">
               <a:ext uri="{FF2B5EF4-FFF2-40B4-BE49-F238E27FC236}">
-                <a16:creationId xmlns:a16="http://schemas.microsoft.com/office/drawing/2014/main" id="{8A968752-186C-4B19-BE78-A2ECDB199197}"/>
+                <a16:creationId xmlns:a16="http://schemas.microsoft.com/office/drawing/2014/main" id="{1E0AB793-C214-40D9-BB1C-36531B7647E0}"/>
               </a:ext>
             </a:extLst>
           </p:cNvPr>
@@ -4971,7 +4971,7 @@
           <p:cNvPr id="15" name="">
             <a:extLst xmlns:a="http://schemas.openxmlformats.org/drawingml/2006/main">
               <a:ext uri="{FF2B5EF4-FFF2-40B4-BE49-F238E27FC236}">
-                <a16:creationId xmlns:a16="http://schemas.microsoft.com/office/drawing/2014/main" id="{BFDD7FD0-A915-47CB-B402-A5D79734ECA4}"/>
+                <a16:creationId xmlns:a16="http://schemas.microsoft.com/office/drawing/2014/main" id="{3DA17647-044B-4094-BCB3-F3FCB487CC9E}"/>
               </a:ext>
             </a:extLst>
           </p:cNvPr>
@@ -5028,7 +5028,7 @@
           <p:cNvPr id="16" name="">
             <a:extLst xmlns:a="http://schemas.openxmlformats.org/drawingml/2006/main">
               <a:ext uri="{FF2B5EF4-FFF2-40B4-BE49-F238E27FC236}">
-                <a16:creationId xmlns:a16="http://schemas.microsoft.com/office/drawing/2014/main" id="{AEB24F8A-B9A6-4ED2-901C-C1983EF84735}"/>
+                <a16:creationId xmlns:a16="http://schemas.microsoft.com/office/drawing/2014/main" id="{33F52F51-E41D-4E0D-A5E0-A3D301906065}"/>
               </a:ext>
             </a:extLst>
           </p:cNvPr>
@@ -5058,7 +5058,7 @@
           <p:cNvPr id="17" name="">
             <a:extLst xmlns:a="http://schemas.openxmlformats.org/drawingml/2006/main">
               <a:ext uri="{FF2B5EF4-FFF2-40B4-BE49-F238E27FC236}">
-                <a16:creationId xmlns:a16="http://schemas.microsoft.com/office/drawing/2014/main" id="{58CBCBE7-9AB5-48C3-8489-3FAEB79DCEAA}"/>
+                <a16:creationId xmlns:a16="http://schemas.microsoft.com/office/drawing/2014/main" id="{D19CC71E-9B5F-45E7-AB3C-D9F8E07995FA}"/>
               </a:ext>
             </a:extLst>
           </p:cNvPr>
@@ -5115,7 +5115,7 @@
           <p:cNvPr id="18" name="">
             <a:extLst xmlns:a="http://schemas.openxmlformats.org/drawingml/2006/main">
               <a:ext uri="{FF2B5EF4-FFF2-40B4-BE49-F238E27FC236}">
-                <a16:creationId xmlns:a16="http://schemas.microsoft.com/office/drawing/2014/main" id="{2FD1CA06-5000-4B46-92E2-8623615D7A31}"/>
+                <a16:creationId xmlns:a16="http://schemas.microsoft.com/office/drawing/2014/main" id="{1EDFE261-BB37-4A52-A767-D4E727218A49}"/>
               </a:ext>
             </a:extLst>
           </p:cNvPr>
@@ -5195,7 +5195,7 @@
           <p:cNvPr id="19" name="">
             <a:extLst xmlns:a="http://schemas.openxmlformats.org/drawingml/2006/main">
               <a:ext uri="{FF2B5EF4-FFF2-40B4-BE49-F238E27FC236}">
-                <a16:creationId xmlns:a16="http://schemas.microsoft.com/office/drawing/2014/main" id="{19E85E5D-7BC8-4C66-84C1-763D81186082}"/>
+                <a16:creationId xmlns:a16="http://schemas.microsoft.com/office/drawing/2014/main" id="{A7041062-2325-479A-97E6-B392FC298A8A}"/>
               </a:ext>
             </a:extLst>
           </p:cNvPr>
@@ -5252,7 +5252,7 @@
           <p:cNvPr id="20" name="">
             <a:extLst xmlns:a="http://schemas.openxmlformats.org/drawingml/2006/main">
               <a:ext uri="{FF2B5EF4-FFF2-40B4-BE49-F238E27FC236}">
-                <a16:creationId xmlns:a16="http://schemas.microsoft.com/office/drawing/2014/main" id="{E09273F8-0150-41EB-BB32-CEE7FD584744}"/>
+                <a16:creationId xmlns:a16="http://schemas.microsoft.com/office/drawing/2014/main" id="{FD4A3612-2B55-4ED4-8DBE-EE4E15E19238}"/>
               </a:ext>
             </a:extLst>
           </p:cNvPr>
@@ -5309,7 +5309,7 @@
           <p:cNvPr id="21" name="">
             <a:extLst xmlns:a="http://schemas.openxmlformats.org/drawingml/2006/main">
               <a:ext uri="{FF2B5EF4-FFF2-40B4-BE49-F238E27FC236}">
-                <a16:creationId xmlns:a16="http://schemas.microsoft.com/office/drawing/2014/main" id="{B5F59387-B269-4976-AF63-D27688C832D2}"/>
+                <a16:creationId xmlns:a16="http://schemas.microsoft.com/office/drawing/2014/main" id="{4AC495DA-0420-4894-9351-DA9E1836DA46}"/>
               </a:ext>
             </a:extLst>
           </p:cNvPr>
@@ -5339,7 +5339,7 @@
           <p:cNvPr id="22" name="">
             <a:extLst xmlns:a="http://schemas.openxmlformats.org/drawingml/2006/main">
               <a:ext uri="{FF2B5EF4-FFF2-40B4-BE49-F238E27FC236}">
-                <a16:creationId xmlns:a16="http://schemas.microsoft.com/office/drawing/2014/main" id="{931A901D-9B68-4DB1-AF8D-1B0C03335265}"/>
+                <a16:creationId xmlns:a16="http://schemas.microsoft.com/office/drawing/2014/main" id="{EF3978C8-6980-44CB-BDAB-7C5BF7075B78}"/>
               </a:ext>
             </a:extLst>
           </p:cNvPr>
@@ -5396,7 +5396,7 @@
           <p:cNvPr id="23" name="">
             <a:extLst xmlns:a="http://schemas.openxmlformats.org/drawingml/2006/main">
               <a:ext uri="{FF2B5EF4-FFF2-40B4-BE49-F238E27FC236}">
-                <a16:creationId xmlns:a16="http://schemas.microsoft.com/office/drawing/2014/main" id="{F4A5FEA1-5443-45B6-B872-F606F5083CF0}"/>
+                <a16:creationId xmlns:a16="http://schemas.microsoft.com/office/drawing/2014/main" id="{CA4AB446-11E9-4363-B3A0-3085179B6C8E}"/>
               </a:ext>
             </a:extLst>
           </p:cNvPr>
@@ -5476,7 +5476,7 @@
           <p:cNvPr id="24" name="">
             <a:extLst xmlns:a="http://schemas.openxmlformats.org/drawingml/2006/main">
               <a:ext uri="{FF2B5EF4-FFF2-40B4-BE49-F238E27FC236}">
-                <a16:creationId xmlns:a16="http://schemas.microsoft.com/office/drawing/2014/main" id="{C9DE838A-3A0C-4D03-8D51-6F510FF5F8D3}"/>
+                <a16:creationId xmlns:a16="http://schemas.microsoft.com/office/drawing/2014/main" id="{97E20B5E-8DE7-4B44-A1D5-C436F357F6BD}"/>
               </a:ext>
             </a:extLst>
           </p:cNvPr>
@@ -5533,7 +5533,7 @@
           <p:cNvPr id="25" name="">
             <a:extLst xmlns:a="http://schemas.openxmlformats.org/drawingml/2006/main">
               <a:ext uri="{FF2B5EF4-FFF2-40B4-BE49-F238E27FC236}">
-                <a16:creationId xmlns:a16="http://schemas.microsoft.com/office/drawing/2014/main" id="{B87FBD7B-F96F-4D05-91DC-6BBBF9578911}"/>
+                <a16:creationId xmlns:a16="http://schemas.microsoft.com/office/drawing/2014/main" id="{6219BD8F-4614-40D3-A0DB-6F009E31C46E}"/>
               </a:ext>
             </a:extLst>
           </p:cNvPr>
@@ -5590,7 +5590,7 @@
           <p:cNvPr id="26" name="">
             <a:extLst xmlns:a="http://schemas.openxmlformats.org/drawingml/2006/main">
               <a:ext uri="{FF2B5EF4-FFF2-40B4-BE49-F238E27FC236}">
-                <a16:creationId xmlns:a16="http://schemas.microsoft.com/office/drawing/2014/main" id="{98BF1CDA-3043-49C5-BEA8-9E6ADE51EDDF}"/>
+                <a16:creationId xmlns:a16="http://schemas.microsoft.com/office/drawing/2014/main" id="{1DE2D517-27D9-475C-873B-1F3211436E3F}"/>
               </a:ext>
             </a:extLst>
           </p:cNvPr>
@@ -5620,7 +5620,7 @@
           <p:cNvPr id="27" name="">
             <a:extLst xmlns:a="http://schemas.openxmlformats.org/drawingml/2006/main">
               <a:ext uri="{FF2B5EF4-FFF2-40B4-BE49-F238E27FC236}">
-                <a16:creationId xmlns:a16="http://schemas.microsoft.com/office/drawing/2014/main" id="{A2EBABBB-2DFA-4C48-BF77-B835DD8B82EB}"/>
+                <a16:creationId xmlns:a16="http://schemas.microsoft.com/office/drawing/2014/main" id="{CA2D6916-B2EB-4B8D-9902-A9DED2BA9ACE}"/>
               </a:ext>
             </a:extLst>
           </p:cNvPr>
@@ -5677,7 +5677,7 @@
           <p:cNvPr id="28" name="">
             <a:extLst xmlns:a="http://schemas.openxmlformats.org/drawingml/2006/main">
               <a:ext uri="{FF2B5EF4-FFF2-40B4-BE49-F238E27FC236}">
-                <a16:creationId xmlns:a16="http://schemas.microsoft.com/office/drawing/2014/main" id="{D8C5050D-E7F6-457B-AD2C-F2DC26DCD8CA}"/>
+                <a16:creationId xmlns:a16="http://schemas.microsoft.com/office/drawing/2014/main" id="{597CD35D-4A87-44A6-8306-8E47E950076F}"/>
               </a:ext>
             </a:extLst>
           </p:cNvPr>
@@ -5757,7 +5757,7 @@
           <p:cNvPr id="29" name="">
             <a:extLst xmlns:a="http://schemas.openxmlformats.org/drawingml/2006/main">
               <a:ext uri="{FF2B5EF4-FFF2-40B4-BE49-F238E27FC236}">
-                <a16:creationId xmlns:a16="http://schemas.microsoft.com/office/drawing/2014/main" id="{2065A652-C5E3-490A-B8EC-CBE71988217A}"/>
+                <a16:creationId xmlns:a16="http://schemas.microsoft.com/office/drawing/2014/main" id="{C817B1A8-233F-42AB-B57A-9A815812F2C3}"/>
               </a:ext>
             </a:extLst>
           </p:cNvPr>
@@ -5787,7 +5787,7 @@
           <p:cNvPr id="30" name="">
             <a:extLst xmlns:a="http://schemas.openxmlformats.org/drawingml/2006/main">
               <a:ext uri="{FF2B5EF4-FFF2-40B4-BE49-F238E27FC236}">
-                <a16:creationId xmlns:a16="http://schemas.microsoft.com/office/drawing/2014/main" id="{59E8A6B7-AC7D-426B-A464-D58995C5C226}"/>
+                <a16:creationId xmlns:a16="http://schemas.microsoft.com/office/drawing/2014/main" id="{6FF77238-1F15-4F4F-8061-888E0588DC05}"/>
               </a:ext>
             </a:extLst>
           </p:cNvPr>
@@ -5844,7 +5844,7 @@
           <p:cNvPr id="31" name="">
             <a:extLst xmlns:a="http://schemas.openxmlformats.org/drawingml/2006/main">
               <a:ext uri="{FF2B5EF4-FFF2-40B4-BE49-F238E27FC236}">
-                <a16:creationId xmlns:a16="http://schemas.microsoft.com/office/drawing/2014/main" id="{1D108D35-B0C6-4C1C-AAF4-AD4704094484}"/>
+                <a16:creationId xmlns:a16="http://schemas.microsoft.com/office/drawing/2014/main" id="{8A354E1D-179A-46F4-B2B0-FF617F899FD2}"/>
               </a:ext>
             </a:extLst>
           </p:cNvPr>
@@ -5901,7 +5901,7 @@
           <p:cNvPr id="32" name="">
             <a:extLst xmlns:a="http://schemas.openxmlformats.org/drawingml/2006/main">
               <a:ext uri="{FF2B5EF4-FFF2-40B4-BE49-F238E27FC236}">
-                <a16:creationId xmlns:a16="http://schemas.microsoft.com/office/drawing/2014/main" id="{FDB8C121-2924-4AB9-BB0B-781D273DB66D}"/>
+                <a16:creationId xmlns:a16="http://schemas.microsoft.com/office/drawing/2014/main" id="{ECDA0C95-BCA3-4F55-A18D-BC78FC91998A}"/>
               </a:ext>
             </a:extLst>
           </p:cNvPr>
@@ -5931,7 +5931,7 @@
           <p:cNvPr id="33" name="">
             <a:extLst xmlns:a="http://schemas.openxmlformats.org/drawingml/2006/main">
               <a:ext uri="{FF2B5EF4-FFF2-40B4-BE49-F238E27FC236}">
-                <a16:creationId xmlns:a16="http://schemas.microsoft.com/office/drawing/2014/main" id="{B6C14E47-A36A-4ACC-A178-9353ECA0F46F}"/>
+                <a16:creationId xmlns:a16="http://schemas.microsoft.com/office/drawing/2014/main" id="{1661F6FC-9B16-47A6-B064-AFD30896B7EB}"/>
               </a:ext>
             </a:extLst>
           </p:cNvPr>
@@ -5986,7 +5986,7 @@
     </p:spTree>
     <p:extLst>
       <p:ext uri="{BB962C8B-B14F-4D97-AF65-F5344CB8AC3E}">
-        <p14:creationId xmlns:p14="http://schemas.microsoft.com/office/powerpoint/2010/main" val="331944219"/>
+        <p14:creationId xmlns:p14="http://schemas.microsoft.com/office/powerpoint/2010/main" val="2029924039"/>
       </p:ext>
     </p:extLst>
   </p:cSld>
@@ -6017,7 +6017,7 @@
           <p:cNvPr id="14" name="">
             <a:extLst xmlns:a="http://schemas.openxmlformats.org/drawingml/2006/main">
               <a:ext uri="{FF2B5EF4-FFF2-40B4-BE49-F238E27FC236}">
-                <a16:creationId xmlns:a16="http://schemas.microsoft.com/office/drawing/2014/main" id="{4E480C60-8B30-45AB-BD6F-8A372860087A}"/>
+                <a16:creationId xmlns:a16="http://schemas.microsoft.com/office/drawing/2014/main" id="{3E0538A0-A3FD-40BE-BBD4-943A539978ED}"/>
               </a:ext>
             </a:extLst>
           </p:cNvPr>
@@ -6047,7 +6047,7 @@
           <p:cNvPr id="2" name="">
             <a:extLst xmlns:a="http://schemas.openxmlformats.org/drawingml/2006/main">
               <a:ext uri="{FF2B5EF4-FFF2-40B4-BE49-F238E27FC236}">
-                <a16:creationId xmlns:a16="http://schemas.microsoft.com/office/drawing/2014/main" id="{2EF3C818-1D3C-420E-93D9-C6920FAE9545}"/>
+                <a16:creationId xmlns:a16="http://schemas.microsoft.com/office/drawing/2014/main" id="{6D56E3AC-19BC-4ED8-80FB-6AC61FDED551}"/>
               </a:ext>
             </a:extLst>
           </p:cNvPr>
@@ -6077,7 +6077,7 @@
           <p:cNvPr id="3" name="">
             <a:extLst xmlns:a="http://schemas.openxmlformats.org/drawingml/2006/main">
               <a:ext uri="{FF2B5EF4-FFF2-40B4-BE49-F238E27FC236}">
-                <a16:creationId xmlns:a16="http://schemas.microsoft.com/office/drawing/2014/main" id="{737FA502-0A49-43B0-A6B2-8ADDF8A82633}"/>
+                <a16:creationId xmlns:a16="http://schemas.microsoft.com/office/drawing/2014/main" id="{9181FF2E-19A3-435C-B31F-27DE1E302902}"/>
               </a:ext>
             </a:extLst>
           </p:cNvPr>
@@ -6107,7 +6107,7 @@
           <p:cNvPr id="4" name="">
             <a:extLst xmlns:a="http://schemas.openxmlformats.org/drawingml/2006/main">
               <a:ext uri="{FF2B5EF4-FFF2-40B4-BE49-F238E27FC236}">
-                <a16:creationId xmlns:a16="http://schemas.microsoft.com/office/drawing/2014/main" id="{1D1379BD-610E-4422-ACCC-3A94EBBD4980}"/>
+                <a16:creationId xmlns:a16="http://schemas.microsoft.com/office/drawing/2014/main" id="{2AB20A5E-5877-4A8E-87FB-822FC9CE3E11}"/>
               </a:ext>
             </a:extLst>
           </p:cNvPr>
@@ -6164,7 +6164,7 @@
           <p:cNvPr id="5" name="">
             <a:extLst xmlns:a="http://schemas.openxmlformats.org/drawingml/2006/main">
               <a:ext uri="{FF2B5EF4-FFF2-40B4-BE49-F238E27FC236}">
-                <a16:creationId xmlns:a16="http://schemas.microsoft.com/office/drawing/2014/main" id="{E2122F2E-CBE4-4F9C-A83F-6583F1E883CE}"/>
+                <a16:creationId xmlns:a16="http://schemas.microsoft.com/office/drawing/2014/main" id="{56873D31-9A32-4A02-9F00-9A47B9BC7370}"/>
               </a:ext>
             </a:extLst>
           </p:cNvPr>
@@ -6221,7 +6221,7 @@
           <p:cNvPr id="6" name="">
             <a:extLst xmlns:a="http://schemas.openxmlformats.org/drawingml/2006/main">
               <a:ext uri="{FF2B5EF4-FFF2-40B4-BE49-F238E27FC236}">
-                <a16:creationId xmlns:a16="http://schemas.microsoft.com/office/drawing/2014/main" id="{5BE31BFE-41A7-45E6-99AF-7E579409E5E0}"/>
+                <a16:creationId xmlns:a16="http://schemas.microsoft.com/office/drawing/2014/main" id="{6AA6323D-128D-4AE5-8DAA-01AD405AFAB9}"/>
               </a:ext>
             </a:extLst>
           </p:cNvPr>
@@ -6278,7 +6278,7 @@
           <p:cNvPr id="7" name="">
             <a:extLst xmlns:a="http://schemas.openxmlformats.org/drawingml/2006/main">
               <a:ext uri="{FF2B5EF4-FFF2-40B4-BE49-F238E27FC236}">
-                <a16:creationId xmlns:a16="http://schemas.microsoft.com/office/drawing/2014/main" id="{64DACEA4-7EF9-4206-878F-BB9021429AA3}"/>
+                <a16:creationId xmlns:a16="http://schemas.microsoft.com/office/drawing/2014/main" id="{82F8154E-530C-42CC-84C0-1BA7BD0AA5DF}"/>
               </a:ext>
             </a:extLst>
           </p:cNvPr>
@@ -6335,7 +6335,7 @@
           <p:cNvPr id="8" name="">
             <a:extLst xmlns:a="http://schemas.openxmlformats.org/drawingml/2006/main">
               <a:ext uri="{FF2B5EF4-FFF2-40B4-BE49-F238E27FC236}">
-                <a16:creationId xmlns:a16="http://schemas.microsoft.com/office/drawing/2014/main" id="{E43E4BB6-9571-4C2B-915E-6155E5569718}"/>
+                <a16:creationId xmlns:a16="http://schemas.microsoft.com/office/drawing/2014/main" id="{AB3EA7C0-EC7E-471E-8F72-65DCC15227F0}"/>
               </a:ext>
             </a:extLst>
           </p:cNvPr>
@@ -6392,7 +6392,7 @@
           <p:cNvPr id="9" name="">
             <a:extLst xmlns:a="http://schemas.openxmlformats.org/drawingml/2006/main">
               <a:ext uri="{FF2B5EF4-FFF2-40B4-BE49-F238E27FC236}">
-                <a16:creationId xmlns:a16="http://schemas.microsoft.com/office/drawing/2014/main" id="{0D6543F5-B901-44F5-87BE-BFB57FC06720}"/>
+                <a16:creationId xmlns:a16="http://schemas.microsoft.com/office/drawing/2014/main" id="{CD3BC771-BB12-4909-879E-B72325F7A75A}"/>
               </a:ext>
             </a:extLst>
           </p:cNvPr>
@@ -6449,7 +6449,7 @@
           <p:cNvPr id="10" name="">
             <a:extLst xmlns:a="http://schemas.openxmlformats.org/drawingml/2006/main">
               <a:ext uri="{FF2B5EF4-FFF2-40B4-BE49-F238E27FC236}">
-                <a16:creationId xmlns:a16="http://schemas.microsoft.com/office/drawing/2014/main" id="{930C15C9-8A3F-4365-BBCA-CC9FC9FB0C35}"/>
+                <a16:creationId xmlns:a16="http://schemas.microsoft.com/office/drawing/2014/main" id="{57600BBF-2D62-4CEE-B0A7-B804F66AABDF}"/>
               </a:ext>
             </a:extLst>
           </p:cNvPr>
@@ -6506,7 +6506,7 @@
           <p:cNvPr id="11" name="">
             <a:extLst xmlns:a="http://schemas.openxmlformats.org/drawingml/2006/main">
               <a:ext uri="{FF2B5EF4-FFF2-40B4-BE49-F238E27FC236}">
-                <a16:creationId xmlns:a16="http://schemas.microsoft.com/office/drawing/2014/main" id="{89B8317F-62A7-4F56-B911-8980FB4972E5}"/>
+                <a16:creationId xmlns:a16="http://schemas.microsoft.com/office/drawing/2014/main" id="{D3E0EEBC-F9E3-4BDC-9C0A-D7A71651256C}"/>
               </a:ext>
             </a:extLst>
           </p:cNvPr>
@@ -6563,7 +6563,7 @@
           <p:cNvPr id="12" name="">
             <a:extLst xmlns:a="http://schemas.openxmlformats.org/drawingml/2006/main">
               <a:ext uri="{FF2B5EF4-FFF2-40B4-BE49-F238E27FC236}">
-                <a16:creationId xmlns:a16="http://schemas.microsoft.com/office/drawing/2014/main" id="{6DA26B97-0575-458B-85AA-28923756FBCF}"/>
+                <a16:creationId xmlns:a16="http://schemas.microsoft.com/office/drawing/2014/main" id="{0409DF45-AF4D-400F-B170-B2D1550E4804}"/>
               </a:ext>
             </a:extLst>
           </p:cNvPr>
@@ -6593,7 +6593,7 @@
           <p:cNvPr id="13" name="">
             <a:extLst xmlns:a="http://schemas.openxmlformats.org/drawingml/2006/main">
               <a:ext uri="{FF2B5EF4-FFF2-40B4-BE49-F238E27FC236}">
-                <a16:creationId xmlns:a16="http://schemas.microsoft.com/office/drawing/2014/main" id="{5AAF5DE1-9F18-4353-B558-521AC91A5059}"/>
+                <a16:creationId xmlns:a16="http://schemas.microsoft.com/office/drawing/2014/main" id="{7CB829A1-A755-415E-910E-1205869924C7}"/>
               </a:ext>
             </a:extLst>
           </p:cNvPr>
@@ -6648,7 +6648,7 @@
     </p:spTree>
     <p:extLst>
       <p:ext uri="{BB962C8B-B14F-4D97-AF65-F5344CB8AC3E}">
-        <p14:creationId xmlns:p14="http://schemas.microsoft.com/office/powerpoint/2010/main" val="2117773828"/>
+        <p14:creationId xmlns:p14="http://schemas.microsoft.com/office/powerpoint/2010/main" val="1966652454"/>
       </p:ext>
     </p:extLst>
   </p:cSld>
@@ -6679,7 +6679,7 @@
           <p:cNvPr id="20" name="">
             <a:extLst xmlns:a="http://schemas.openxmlformats.org/drawingml/2006/main">
               <a:ext uri="{FF2B5EF4-FFF2-40B4-BE49-F238E27FC236}">
-                <a16:creationId xmlns:a16="http://schemas.microsoft.com/office/drawing/2014/main" id="{486EFF28-2265-478E-99CD-701B4F36340A}"/>
+                <a16:creationId xmlns:a16="http://schemas.microsoft.com/office/drawing/2014/main" id="{5151B18D-EC66-46AC-886F-E8F8D19200B8}"/>
               </a:ext>
             </a:extLst>
           </p:cNvPr>
@@ -6709,7 +6709,7 @@
           <p:cNvPr id="2" name="">
             <a:extLst xmlns:a="http://schemas.openxmlformats.org/drawingml/2006/main">
               <a:ext uri="{FF2B5EF4-FFF2-40B4-BE49-F238E27FC236}">
-                <a16:creationId xmlns:a16="http://schemas.microsoft.com/office/drawing/2014/main" id="{1875CD11-D5C0-401A-BC62-63E40BA1E2EE}"/>
+                <a16:creationId xmlns:a16="http://schemas.microsoft.com/office/drawing/2014/main" id="{8C42E26F-B5A6-4FFC-96E3-E83BF2321325}"/>
               </a:ext>
             </a:extLst>
           </p:cNvPr>
@@ -6739,7 +6739,7 @@
           <p:cNvPr id="3" name="">
             <a:extLst xmlns:a="http://schemas.openxmlformats.org/drawingml/2006/main">
               <a:ext uri="{FF2B5EF4-FFF2-40B4-BE49-F238E27FC236}">
-                <a16:creationId xmlns:a16="http://schemas.microsoft.com/office/drawing/2014/main" id="{6DF6898C-9456-47E5-B2E7-1AFBBAF6BEC8}"/>
+                <a16:creationId xmlns:a16="http://schemas.microsoft.com/office/drawing/2014/main" id="{96725A69-DF4A-40B0-8C92-39CC59802BD5}"/>
               </a:ext>
             </a:extLst>
           </p:cNvPr>
@@ -6769,7 +6769,7 @@
           <p:cNvPr id="4" name="">
             <a:extLst xmlns:a="http://schemas.openxmlformats.org/drawingml/2006/main">
               <a:ext uri="{FF2B5EF4-FFF2-40B4-BE49-F238E27FC236}">
-                <a16:creationId xmlns:a16="http://schemas.microsoft.com/office/drawing/2014/main" id="{BE6C36EE-B5D6-4399-B893-35C9E8577C17}"/>
+                <a16:creationId xmlns:a16="http://schemas.microsoft.com/office/drawing/2014/main" id="{1033BB67-4776-468B-B140-53FE78C44BD1}"/>
               </a:ext>
             </a:extLst>
           </p:cNvPr>
@@ -6826,7 +6826,7 @@
           <p:cNvPr id="5" name="">
             <a:extLst xmlns:a="http://schemas.openxmlformats.org/drawingml/2006/main">
               <a:ext uri="{FF2B5EF4-FFF2-40B4-BE49-F238E27FC236}">
-                <a16:creationId xmlns:a16="http://schemas.microsoft.com/office/drawing/2014/main" id="{E99DF44C-96FF-4F20-98F3-F71E63361BDA}"/>
+                <a16:creationId xmlns:a16="http://schemas.microsoft.com/office/drawing/2014/main" id="{C29CFBE5-837B-445C-990A-27AA8BCC4AE2}"/>
               </a:ext>
             </a:extLst>
           </p:cNvPr>
@@ -6856,7 +6856,7 @@
           <p:cNvPr id="6" name="">
             <a:extLst xmlns:a="http://schemas.openxmlformats.org/drawingml/2006/main">
               <a:ext uri="{FF2B5EF4-FFF2-40B4-BE49-F238E27FC236}">
-                <a16:creationId xmlns:a16="http://schemas.microsoft.com/office/drawing/2014/main" id="{822EA884-AD85-45A5-BDD9-A1A03BE119D3}"/>
+                <a16:creationId xmlns:a16="http://schemas.microsoft.com/office/drawing/2014/main" id="{D5C673BF-F71F-4B35-B184-1027837F4976}"/>
               </a:ext>
             </a:extLst>
           </p:cNvPr>
@@ -6913,7 +6913,7 @@
           <p:cNvPr id="7" name="">
             <a:extLst xmlns:a="http://schemas.openxmlformats.org/drawingml/2006/main">
               <a:ext uri="{FF2B5EF4-FFF2-40B4-BE49-F238E27FC236}">
-                <a16:creationId xmlns:a16="http://schemas.microsoft.com/office/drawing/2014/main" id="{08BBB30F-4AD3-4826-AF24-EEC26D65CD11}"/>
+                <a16:creationId xmlns:a16="http://schemas.microsoft.com/office/drawing/2014/main" id="{F0E2392A-D659-40F2-9BC4-E9B6E57D81D0}"/>
               </a:ext>
             </a:extLst>
           </p:cNvPr>
@@ -6970,7 +6970,7 @@
           <p:cNvPr id="8" name="">
             <a:extLst xmlns:a="http://schemas.openxmlformats.org/drawingml/2006/main">
               <a:ext uri="{FF2B5EF4-FFF2-40B4-BE49-F238E27FC236}">
-                <a16:creationId xmlns:a16="http://schemas.microsoft.com/office/drawing/2014/main" id="{5DD16B0B-12E1-41DF-9C80-18C6FCF4A38F}"/>
+                <a16:creationId xmlns:a16="http://schemas.microsoft.com/office/drawing/2014/main" id="{CB7EA9C1-463A-4208-9829-5717032F0362}"/>
               </a:ext>
             </a:extLst>
           </p:cNvPr>
@@ -7027,7 +7027,7 @@
           <p:cNvPr id="9" name="">
             <a:extLst xmlns:a="http://schemas.openxmlformats.org/drawingml/2006/main">
               <a:ext uri="{FF2B5EF4-FFF2-40B4-BE49-F238E27FC236}">
-                <a16:creationId xmlns:a16="http://schemas.microsoft.com/office/drawing/2014/main" id="{B74BB74C-84C4-40D4-8278-17624FEF7C8E}"/>
+                <a16:creationId xmlns:a16="http://schemas.microsoft.com/office/drawing/2014/main" id="{7F37417E-5DB3-42FC-8D33-87489F0B56EC}"/>
               </a:ext>
             </a:extLst>
           </p:cNvPr>
@@ -7084,7 +7084,7 @@
           <p:cNvPr id="10" name="">
             <a:extLst xmlns:a="http://schemas.openxmlformats.org/drawingml/2006/main">
               <a:ext uri="{FF2B5EF4-FFF2-40B4-BE49-F238E27FC236}">
-                <a16:creationId xmlns:a16="http://schemas.microsoft.com/office/drawing/2014/main" id="{07D6FB2B-EBD4-48CC-A0B2-EA41251F38AC}"/>
+                <a16:creationId xmlns:a16="http://schemas.microsoft.com/office/drawing/2014/main" id="{DAC91292-4E90-4AF2-8E35-C115F54FC678}"/>
               </a:ext>
             </a:extLst>
           </p:cNvPr>
@@ -7141,7 +7141,7 @@
           <p:cNvPr id="11" name="">
             <a:extLst xmlns:a="http://schemas.openxmlformats.org/drawingml/2006/main">
               <a:ext uri="{FF2B5EF4-FFF2-40B4-BE49-F238E27FC236}">
-                <a16:creationId xmlns:a16="http://schemas.microsoft.com/office/drawing/2014/main" id="{79F82C42-9961-471F-A45D-E556444EBA02}"/>
+                <a16:creationId xmlns:a16="http://schemas.microsoft.com/office/drawing/2014/main" id="{23FA439E-A6ED-4C71-B7F7-51CCBA57C1C2}"/>
               </a:ext>
             </a:extLst>
           </p:cNvPr>
@@ -7198,7 +7198,7 @@
           <p:cNvPr id="12" name="">
             <a:extLst xmlns:a="http://schemas.openxmlformats.org/drawingml/2006/main">
               <a:ext uri="{FF2B5EF4-FFF2-40B4-BE49-F238E27FC236}">
-                <a16:creationId xmlns:a16="http://schemas.microsoft.com/office/drawing/2014/main" id="{A2400CE3-EEE6-43D7-8DF6-97C29E8C6067}"/>
+                <a16:creationId xmlns:a16="http://schemas.microsoft.com/office/drawing/2014/main" id="{20B7CA36-713E-4098-A8D5-7E8F82E24A9E}"/>
               </a:ext>
             </a:extLst>
           </p:cNvPr>
@@ -7255,7 +7255,7 @@
           <p:cNvPr id="13" name="">
             <a:extLst xmlns:a="http://schemas.openxmlformats.org/drawingml/2006/main">
               <a:ext uri="{FF2B5EF4-FFF2-40B4-BE49-F238E27FC236}">
-                <a16:creationId xmlns:a16="http://schemas.microsoft.com/office/drawing/2014/main" id="{0BD71ED9-DDF4-4052-B833-FF4702D2FC77}"/>
+                <a16:creationId xmlns:a16="http://schemas.microsoft.com/office/drawing/2014/main" id="{AB5FC4D9-1E1C-44C6-A4AE-7B5958BEE496}"/>
               </a:ext>
             </a:extLst>
           </p:cNvPr>
@@ -7312,7 +7312,7 @@
           <p:cNvPr id="14" name="">
             <a:extLst xmlns:a="http://schemas.openxmlformats.org/drawingml/2006/main">
               <a:ext uri="{FF2B5EF4-FFF2-40B4-BE49-F238E27FC236}">
-                <a16:creationId xmlns:a16="http://schemas.microsoft.com/office/drawing/2014/main" id="{3EF19B27-7BA8-423B-B5D2-8863D8080888}"/>
+                <a16:creationId xmlns:a16="http://schemas.microsoft.com/office/drawing/2014/main" id="{6AACD679-F04B-4D5B-8406-ED619BEC1D7B}"/>
               </a:ext>
             </a:extLst>
           </p:cNvPr>
@@ -7369,7 +7369,7 @@
           <p:cNvPr id="15" name="">
             <a:extLst xmlns:a="http://schemas.openxmlformats.org/drawingml/2006/main">
               <a:ext uri="{FF2B5EF4-FFF2-40B4-BE49-F238E27FC236}">
-                <a16:creationId xmlns:a16="http://schemas.microsoft.com/office/drawing/2014/main" id="{D6984579-6EB8-428A-840D-3A3C735110E9}"/>
+                <a16:creationId xmlns:a16="http://schemas.microsoft.com/office/drawing/2014/main" id="{57A19F4D-4533-453A-BE7E-4AC798984C1A}"/>
               </a:ext>
             </a:extLst>
           </p:cNvPr>
@@ -7426,7 +7426,7 @@
           <p:cNvPr id="16" name="">
             <a:extLst xmlns:a="http://schemas.openxmlformats.org/drawingml/2006/main">
               <a:ext uri="{FF2B5EF4-FFF2-40B4-BE49-F238E27FC236}">
-                <a16:creationId xmlns:a16="http://schemas.microsoft.com/office/drawing/2014/main" id="{998A1D1C-0F69-4F1D-9A4E-AF1A39CD55EF}"/>
+                <a16:creationId xmlns:a16="http://schemas.microsoft.com/office/drawing/2014/main" id="{BB1F61EC-59DB-423A-A23E-8432F4EEC8A7}"/>
               </a:ext>
             </a:extLst>
           </p:cNvPr>
@@ -7483,7 +7483,7 @@
           <p:cNvPr id="17" name="">
             <a:extLst xmlns:a="http://schemas.openxmlformats.org/drawingml/2006/main">
               <a:ext uri="{FF2B5EF4-FFF2-40B4-BE49-F238E27FC236}">
-                <a16:creationId xmlns:a16="http://schemas.microsoft.com/office/drawing/2014/main" id="{9D21F3A4-8E68-46D0-87F5-CEF4C9BD2295}"/>
+                <a16:creationId xmlns:a16="http://schemas.microsoft.com/office/drawing/2014/main" id="{0B474E2D-AF78-410B-9004-F8C7A9C8AB05}"/>
               </a:ext>
             </a:extLst>
           </p:cNvPr>
@@ -7540,7 +7540,7 @@
           <p:cNvPr id="18" name="">
             <a:extLst xmlns:a="http://schemas.openxmlformats.org/drawingml/2006/main">
               <a:ext uri="{FF2B5EF4-FFF2-40B4-BE49-F238E27FC236}">
-                <a16:creationId xmlns:a16="http://schemas.microsoft.com/office/drawing/2014/main" id="{D811F790-40F4-43A6-8922-3FCDD9CFB817}"/>
+                <a16:creationId xmlns:a16="http://schemas.microsoft.com/office/drawing/2014/main" id="{2291F7DF-417F-4840-8753-3E5C9E935A9A}"/>
               </a:ext>
             </a:extLst>
           </p:cNvPr>
@@ -7570,7 +7570,7 @@
           <p:cNvPr id="19" name="">
             <a:extLst xmlns:a="http://schemas.openxmlformats.org/drawingml/2006/main">
               <a:ext uri="{FF2B5EF4-FFF2-40B4-BE49-F238E27FC236}">
-                <a16:creationId xmlns:a16="http://schemas.microsoft.com/office/drawing/2014/main" id="{E1C0666D-C908-4466-A464-5E4B89D76675}"/>
+                <a16:creationId xmlns:a16="http://schemas.microsoft.com/office/drawing/2014/main" id="{6B62FD89-3704-44BF-894E-EF9BC3B523FE}"/>
               </a:ext>
             </a:extLst>
           </p:cNvPr>
@@ -7625,7 +7625,7 @@
     </p:spTree>
     <p:extLst>
       <p:ext uri="{BB962C8B-B14F-4D97-AF65-F5344CB8AC3E}">
-        <p14:creationId xmlns:p14="http://schemas.microsoft.com/office/powerpoint/2010/main" val="923686631"/>
+        <p14:creationId xmlns:p14="http://schemas.microsoft.com/office/powerpoint/2010/main" val="805539399"/>
       </p:ext>
     </p:extLst>
   </p:cSld>
@@ -7656,7 +7656,7 @@
           <p:cNvPr id="19" name="">
             <a:extLst xmlns:a="http://schemas.openxmlformats.org/drawingml/2006/main">
               <a:ext uri="{FF2B5EF4-FFF2-40B4-BE49-F238E27FC236}">
-                <a16:creationId xmlns:a16="http://schemas.microsoft.com/office/drawing/2014/main" id="{56BE25DF-B17A-439A-837C-8F8679E2A26B}"/>
+                <a16:creationId xmlns:a16="http://schemas.microsoft.com/office/drawing/2014/main" id="{A918757D-EF8F-4CD2-B0D1-C60FB2F366F6}"/>
               </a:ext>
             </a:extLst>
           </p:cNvPr>
@@ -7686,7 +7686,7 @@
           <p:cNvPr id="2" name="">
             <a:extLst xmlns:a="http://schemas.openxmlformats.org/drawingml/2006/main">
               <a:ext uri="{FF2B5EF4-FFF2-40B4-BE49-F238E27FC236}">
-                <a16:creationId xmlns:a16="http://schemas.microsoft.com/office/drawing/2014/main" id="{B16514BF-C23B-4DE1-9C0B-87F20ECB3000}"/>
+                <a16:creationId xmlns:a16="http://schemas.microsoft.com/office/drawing/2014/main" id="{D5824C6B-E7E1-4411-B62B-BAAF4CA6ED76}"/>
               </a:ext>
             </a:extLst>
           </p:cNvPr>
@@ -7716,7 +7716,7 @@
           <p:cNvPr id="3" name="">
             <a:extLst xmlns:a="http://schemas.openxmlformats.org/drawingml/2006/main">
               <a:ext uri="{FF2B5EF4-FFF2-40B4-BE49-F238E27FC236}">
-                <a16:creationId xmlns:a16="http://schemas.microsoft.com/office/drawing/2014/main" id="{13C6EE83-932F-4433-AECA-E9EF6C3ACFF6}"/>
+                <a16:creationId xmlns:a16="http://schemas.microsoft.com/office/drawing/2014/main" id="{20D38932-79CE-4249-9D86-6AC0061A78F6}"/>
               </a:ext>
             </a:extLst>
           </p:cNvPr>
@@ -7746,7 +7746,7 @@
           <p:cNvPr id="4" name="">
             <a:extLst xmlns:a="http://schemas.openxmlformats.org/drawingml/2006/main">
               <a:ext uri="{FF2B5EF4-FFF2-40B4-BE49-F238E27FC236}">
-                <a16:creationId xmlns:a16="http://schemas.microsoft.com/office/drawing/2014/main" id="{83106CCC-82BA-432C-A095-10376BF0F687}"/>
+                <a16:creationId xmlns:a16="http://schemas.microsoft.com/office/drawing/2014/main" id="{D86D9993-B816-4D90-9702-4CFE4E77D395}"/>
               </a:ext>
             </a:extLst>
           </p:cNvPr>
@@ -7803,7 +7803,7 @@
           <p:cNvPr id="5" name="">
             <a:extLst xmlns:a="http://schemas.openxmlformats.org/drawingml/2006/main">
               <a:ext uri="{FF2B5EF4-FFF2-40B4-BE49-F238E27FC236}">
-                <a16:creationId xmlns:a16="http://schemas.microsoft.com/office/drawing/2014/main" id="{6859555A-C3A9-44F0-80EE-99A9C1E5791B}"/>
+                <a16:creationId xmlns:a16="http://schemas.microsoft.com/office/drawing/2014/main" id="{51D842B7-DD1C-4329-8697-9A4649136CC0}"/>
               </a:ext>
             </a:extLst>
           </p:cNvPr>
@@ -7860,7 +7860,7 @@
           <p:cNvPr id="6" name="">
             <a:extLst xmlns:a="http://schemas.openxmlformats.org/drawingml/2006/main">
               <a:ext uri="{FF2B5EF4-FFF2-40B4-BE49-F238E27FC236}">
-                <a16:creationId xmlns:a16="http://schemas.microsoft.com/office/drawing/2014/main" id="{EA560E04-A5B8-4F1C-8E91-27DF68730D3C}"/>
+                <a16:creationId xmlns:a16="http://schemas.microsoft.com/office/drawing/2014/main" id="{40EA8D74-0683-4F51-9312-2A1E77FF82B7}"/>
               </a:ext>
             </a:extLst>
           </p:cNvPr>
@@ -7917,7 +7917,7 @@
           <p:cNvPr id="7" name="">
             <a:extLst xmlns:a="http://schemas.openxmlformats.org/drawingml/2006/main">
               <a:ext uri="{FF2B5EF4-FFF2-40B4-BE49-F238E27FC236}">
-                <a16:creationId xmlns:a16="http://schemas.microsoft.com/office/drawing/2014/main" id="{D565221C-C048-4C6B-A47D-0A9C892C0943}"/>
+                <a16:creationId xmlns:a16="http://schemas.microsoft.com/office/drawing/2014/main" id="{CE5DE84C-AE2C-4A2A-9BCB-44EE2DC83D5D}"/>
               </a:ext>
             </a:extLst>
           </p:cNvPr>
@@ -7974,7 +7974,7 @@
           <p:cNvPr id="8" name="">
             <a:extLst xmlns:a="http://schemas.openxmlformats.org/drawingml/2006/main">
               <a:ext uri="{FF2B5EF4-FFF2-40B4-BE49-F238E27FC236}">
-                <a16:creationId xmlns:a16="http://schemas.microsoft.com/office/drawing/2014/main" id="{2B6AEC22-D348-45B7-9458-2E6729CB3F34}"/>
+                <a16:creationId xmlns:a16="http://schemas.microsoft.com/office/drawing/2014/main" id="{8F386EE8-A934-42B9-9955-F4DCE25ECA17}"/>
               </a:ext>
             </a:extLst>
           </p:cNvPr>
@@ -8031,7 +8031,7 @@
           <p:cNvPr id="9" name="">
             <a:extLst xmlns:a="http://schemas.openxmlformats.org/drawingml/2006/main">
               <a:ext uri="{FF2B5EF4-FFF2-40B4-BE49-F238E27FC236}">
-                <a16:creationId xmlns:a16="http://schemas.microsoft.com/office/drawing/2014/main" id="{2ED1C628-0A36-4EB9-9886-1E8F62B4F821}"/>
+                <a16:creationId xmlns:a16="http://schemas.microsoft.com/office/drawing/2014/main" id="{476E7BF5-06AD-4D60-A17F-5C962D79DADA}"/>
               </a:ext>
             </a:extLst>
           </p:cNvPr>
@@ -8088,7 +8088,7 @@
           <p:cNvPr id="10" name="">
             <a:extLst xmlns:a="http://schemas.openxmlformats.org/drawingml/2006/main">
               <a:ext uri="{FF2B5EF4-FFF2-40B4-BE49-F238E27FC236}">
-                <a16:creationId xmlns:a16="http://schemas.microsoft.com/office/drawing/2014/main" id="{6B4922A1-8272-44AD-9253-5B3A15350CA3}"/>
+                <a16:creationId xmlns:a16="http://schemas.microsoft.com/office/drawing/2014/main" id="{AD36B4FE-2986-4402-B06E-376CE6505A2E}"/>
               </a:ext>
             </a:extLst>
           </p:cNvPr>
@@ -8145,7 +8145,7 @@
           <p:cNvPr id="11" name="">
             <a:extLst xmlns:a="http://schemas.openxmlformats.org/drawingml/2006/main">
               <a:ext uri="{FF2B5EF4-FFF2-40B4-BE49-F238E27FC236}">
-                <a16:creationId xmlns:a16="http://schemas.microsoft.com/office/drawing/2014/main" id="{77BF80B1-BAC0-4CFF-8164-0FCEE3B1D604}"/>
+                <a16:creationId xmlns:a16="http://schemas.microsoft.com/office/drawing/2014/main" id="{42A43BE9-BC32-4939-B60C-DAA0C0E2F919}"/>
               </a:ext>
             </a:extLst>
           </p:cNvPr>
@@ -8202,7 +8202,7 @@
           <p:cNvPr id="12" name="">
             <a:extLst xmlns:a="http://schemas.openxmlformats.org/drawingml/2006/main">
               <a:ext uri="{FF2B5EF4-FFF2-40B4-BE49-F238E27FC236}">
-                <a16:creationId xmlns:a16="http://schemas.microsoft.com/office/drawing/2014/main" id="{32AD60D1-5CC1-4537-B92C-6E3DCA214FB8}"/>
+                <a16:creationId xmlns:a16="http://schemas.microsoft.com/office/drawing/2014/main" id="{1BAD4CDF-05F9-4E50-ABAD-B57B244481E9}"/>
               </a:ext>
             </a:extLst>
           </p:cNvPr>
@@ -8259,7 +8259,7 @@
           <p:cNvPr id="13" name="">
             <a:extLst xmlns:a="http://schemas.openxmlformats.org/drawingml/2006/main">
               <a:ext uri="{FF2B5EF4-FFF2-40B4-BE49-F238E27FC236}">
-                <a16:creationId xmlns:a16="http://schemas.microsoft.com/office/drawing/2014/main" id="{6DC0EA97-0185-46CC-B1BA-78B07C2AF33F}"/>
+                <a16:creationId xmlns:a16="http://schemas.microsoft.com/office/drawing/2014/main" id="{45323C70-6D72-4F0C-A72B-CC33157D40B0}"/>
               </a:ext>
             </a:extLst>
           </p:cNvPr>
@@ -8316,7 +8316,7 @@
           <p:cNvPr id="14" name="">
             <a:extLst xmlns:a="http://schemas.openxmlformats.org/drawingml/2006/main">
               <a:ext uri="{FF2B5EF4-FFF2-40B4-BE49-F238E27FC236}">
-                <a16:creationId xmlns:a16="http://schemas.microsoft.com/office/drawing/2014/main" id="{620CD900-BA99-49C4-A3B2-ADFFBCFD06C1}"/>
+                <a16:creationId xmlns:a16="http://schemas.microsoft.com/office/drawing/2014/main" id="{1990C904-F83F-4843-A214-4EF98A1B46B5}"/>
               </a:ext>
             </a:extLst>
           </p:cNvPr>
@@ -8346,7 +8346,7 @@
           <p:cNvPr id="15" name="">
             <a:extLst xmlns:a="http://schemas.openxmlformats.org/drawingml/2006/main">
               <a:ext uri="{FF2B5EF4-FFF2-40B4-BE49-F238E27FC236}">
-                <a16:creationId xmlns:a16="http://schemas.microsoft.com/office/drawing/2014/main" id="{252BB909-63FC-4971-8BEF-CD85EE249E71}"/>
+                <a16:creationId xmlns:a16="http://schemas.microsoft.com/office/drawing/2014/main" id="{B2CF7849-6480-4717-B58E-5F2C96CF451F}"/>
               </a:ext>
             </a:extLst>
           </p:cNvPr>
@@ -8403,7 +8403,7 @@
           <p:cNvPr id="16" name="">
             <a:extLst xmlns:a="http://schemas.openxmlformats.org/drawingml/2006/main">
               <a:ext uri="{FF2B5EF4-FFF2-40B4-BE49-F238E27FC236}">
-                <a16:creationId xmlns:a16="http://schemas.microsoft.com/office/drawing/2014/main" id="{3C34A811-ACAF-4DFA-A2EA-D79B3EA06372}"/>
+                <a16:creationId xmlns:a16="http://schemas.microsoft.com/office/drawing/2014/main" id="{9D324B73-ECA6-4818-922A-984C6ED8A61C}"/>
               </a:ext>
             </a:extLst>
           </p:cNvPr>
@@ -8460,7 +8460,7 @@
           <p:cNvPr id="17" name="">
             <a:extLst xmlns:a="http://schemas.openxmlformats.org/drawingml/2006/main">
               <a:ext uri="{FF2B5EF4-FFF2-40B4-BE49-F238E27FC236}">
-                <a16:creationId xmlns:a16="http://schemas.microsoft.com/office/drawing/2014/main" id="{F33911B9-DCFC-43A3-8246-2D71997BE9FD}"/>
+                <a16:creationId xmlns:a16="http://schemas.microsoft.com/office/drawing/2014/main" id="{86A9D9F4-BFD1-415A-B8AA-6A9DF8CE3A11}"/>
               </a:ext>
             </a:extLst>
           </p:cNvPr>
@@ -8490,7 +8490,7 @@
           <p:cNvPr id="18" name="">
             <a:extLst xmlns:a="http://schemas.openxmlformats.org/drawingml/2006/main">
               <a:ext uri="{FF2B5EF4-FFF2-40B4-BE49-F238E27FC236}">
-                <a16:creationId xmlns:a16="http://schemas.microsoft.com/office/drawing/2014/main" id="{EE603056-BBC3-4B42-ABFD-128874CDC50E}"/>
+                <a16:creationId xmlns:a16="http://schemas.microsoft.com/office/drawing/2014/main" id="{585FE3CE-BE9F-4078-B39D-3154EDC926D2}"/>
               </a:ext>
             </a:extLst>
           </p:cNvPr>
@@ -8545,7 +8545,7 @@
     </p:spTree>
     <p:extLst>
       <p:ext uri="{BB962C8B-B14F-4D97-AF65-F5344CB8AC3E}">
-        <p14:creationId xmlns:p14="http://schemas.microsoft.com/office/powerpoint/2010/main" val="417074087"/>
+        <p14:creationId xmlns:p14="http://schemas.microsoft.com/office/powerpoint/2010/main" val="1174424006"/>
       </p:ext>
     </p:extLst>
   </p:cSld>
@@ -8576,7 +8576,7 @@
           <p:cNvPr id="19" name="">
             <a:extLst xmlns:a="http://schemas.openxmlformats.org/drawingml/2006/main">
               <a:ext uri="{FF2B5EF4-FFF2-40B4-BE49-F238E27FC236}">
-                <a16:creationId xmlns:a16="http://schemas.microsoft.com/office/drawing/2014/main" id="{D641102C-7C78-4528-84F8-97437AADBEEC}"/>
+                <a16:creationId xmlns:a16="http://schemas.microsoft.com/office/drawing/2014/main" id="{50FC9F26-8FC7-4A6C-8F2E-559F5446E529}"/>
               </a:ext>
             </a:extLst>
           </p:cNvPr>
@@ -8606,7 +8606,7 @@
           <p:cNvPr id="2" name="">
             <a:extLst xmlns:a="http://schemas.openxmlformats.org/drawingml/2006/main">
               <a:ext uri="{FF2B5EF4-FFF2-40B4-BE49-F238E27FC236}">
-                <a16:creationId xmlns:a16="http://schemas.microsoft.com/office/drawing/2014/main" id="{A8D7D4C8-5CC0-40A3-AAF0-54B30095A0C8}"/>
+                <a16:creationId xmlns:a16="http://schemas.microsoft.com/office/drawing/2014/main" id="{54178C2B-5EFD-4EAA-87B1-8EA851D64C09}"/>
               </a:ext>
             </a:extLst>
           </p:cNvPr>
@@ -8636,7 +8636,7 @@
           <p:cNvPr id="3" name="">
             <a:extLst xmlns:a="http://schemas.openxmlformats.org/drawingml/2006/main">
               <a:ext uri="{FF2B5EF4-FFF2-40B4-BE49-F238E27FC236}">
-                <a16:creationId xmlns:a16="http://schemas.microsoft.com/office/drawing/2014/main" id="{0BCD9CCB-A04D-40FD-A25A-BA5ADE56FFD8}"/>
+                <a16:creationId xmlns:a16="http://schemas.microsoft.com/office/drawing/2014/main" id="{264505E0-28B3-4D07-BE44-C3EA4A248826}"/>
               </a:ext>
             </a:extLst>
           </p:cNvPr>
@@ -8666,7 +8666,7 @@
           <p:cNvPr id="4" name="">
             <a:extLst xmlns:a="http://schemas.openxmlformats.org/drawingml/2006/main">
               <a:ext uri="{FF2B5EF4-FFF2-40B4-BE49-F238E27FC236}">
-                <a16:creationId xmlns:a16="http://schemas.microsoft.com/office/drawing/2014/main" id="{7C5C2D31-83D8-496E-AEA9-5685288B0C62}"/>
+                <a16:creationId xmlns:a16="http://schemas.microsoft.com/office/drawing/2014/main" id="{EDD2325A-C58C-44CC-BAD6-C272C7A073AC}"/>
               </a:ext>
             </a:extLst>
           </p:cNvPr>
@@ -8713,7 +8713,7 @@
                 <a:ea typeface="宋体"/>
                 <a:cs typeface="宋体"/>
               </a:rPr>
-              <a:t>公开数据集上的三项核心挑战</a:t>
+              <a:t>公开数据集上的三个实际问题</a:t>
             </a:r>
           </a:p>
         </p:txBody>
@@ -8723,7 +8723,7 @@
           <p:cNvPr id="5" name="">
             <a:extLst xmlns:a="http://schemas.openxmlformats.org/drawingml/2006/main">
               <a:ext uri="{FF2B5EF4-FFF2-40B4-BE49-F238E27FC236}">
-                <a16:creationId xmlns:a16="http://schemas.microsoft.com/office/drawing/2014/main" id="{07B8934E-DB7A-4716-A544-5DC326F8CB3C}"/>
+                <a16:creationId xmlns:a16="http://schemas.microsoft.com/office/drawing/2014/main" id="{B203BFA7-068E-45EE-888D-0F2E601891DE}"/>
               </a:ext>
             </a:extLst>
           </p:cNvPr>
@@ -8780,7 +8780,7 @@
           <p:cNvPr id="6" name="">
             <a:extLst xmlns:a="http://schemas.openxmlformats.org/drawingml/2006/main">
               <a:ext uri="{FF2B5EF4-FFF2-40B4-BE49-F238E27FC236}">
-                <a16:creationId xmlns:a16="http://schemas.microsoft.com/office/drawing/2014/main" id="{23F27A09-C279-4740-B8BB-5DB4EF818E88}"/>
+                <a16:creationId xmlns:a16="http://schemas.microsoft.com/office/drawing/2014/main" id="{CFB053BB-BCAD-4303-B24A-D046B7ECB1F2}"/>
               </a:ext>
             </a:extLst>
           </p:cNvPr>
@@ -8827,7 +8827,7 @@
                 <a:ea typeface="宋体"/>
                 <a:cs typeface="宋体"/>
               </a:rPr>
-              <a:t>数据异构</a:t>
+              <a:t>模型可能认错目标</a:t>
             </a:r>
           </a:p>
         </p:txBody>
@@ -8837,7 +8837,7 @@
           <p:cNvPr id="7" name="">
             <a:extLst xmlns:a="http://schemas.openxmlformats.org/drawingml/2006/main">
               <a:ext uri="{FF2B5EF4-FFF2-40B4-BE49-F238E27FC236}">
-                <a16:creationId xmlns:a16="http://schemas.microsoft.com/office/drawing/2014/main" id="{55336BC5-E5DF-4022-B813-B6885F4B9912}"/>
+                <a16:creationId xmlns:a16="http://schemas.microsoft.com/office/drawing/2014/main" id="{E0E4FF3D-E9BF-483B-89FA-54C16DFF660D}"/>
               </a:ext>
             </a:extLst>
           </p:cNvPr>
@@ -8884,7 +8884,7 @@
                 <a:ea typeface="宋体"/>
                 <a:cs typeface="宋体"/>
               </a:rPr>
-              <a:t>通道、采样率、参考方式和记录状态不同，模型容易学习数据集来源。</a:t>
+              <a:t>各数据集的电极、采样率和睁闭眼条件不同。模型可能在识别数据来自哪里，而不是识别疾病。</a:t>
             </a:r>
           </a:p>
         </p:txBody>
@@ -8894,7 +8894,7 @@
           <p:cNvPr id="8" name="">
             <a:extLst xmlns:a="http://schemas.openxmlformats.org/drawingml/2006/main">
               <a:ext uri="{FF2B5EF4-FFF2-40B4-BE49-F238E27FC236}">
-                <a16:creationId xmlns:a16="http://schemas.microsoft.com/office/drawing/2014/main" id="{A19BEA90-B213-4D37-947C-D4DB34A7FAC3}"/>
+                <a16:creationId xmlns:a16="http://schemas.microsoft.com/office/drawing/2014/main" id="{A0DE6434-4234-4888-A81B-A8885FBF0237}"/>
               </a:ext>
             </a:extLst>
           </p:cNvPr>
@@ -8951,7 +8951,7 @@
           <p:cNvPr id="9" name="">
             <a:extLst xmlns:a="http://schemas.openxmlformats.org/drawingml/2006/main">
               <a:ext uri="{FF2B5EF4-FFF2-40B4-BE49-F238E27FC236}">
-                <a16:creationId xmlns:a16="http://schemas.microsoft.com/office/drawing/2014/main" id="{010CF090-19C6-4EB5-BE85-BC87FA6C1A8F}"/>
+                <a16:creationId xmlns:a16="http://schemas.microsoft.com/office/drawing/2014/main" id="{4879C81B-F0BA-47BA-82B9-3703F3A364F5}"/>
               </a:ext>
             </a:extLst>
           </p:cNvPr>
@@ -8975,7 +8975,7 @@
         </p:spPr>
         <p:txBody>
           <a:bodyPr xmlns:a="http://schemas.openxmlformats.org/drawingml/2006/main" anchor="ctr">
-            <a:normAutofit fontScale="100000"/>
+            <a:normAutofit fontScale="96328"/>
           </a:bodyPr>
           <a:lstStyle xmlns:a="http://schemas.openxmlformats.org/drawingml/2006/main"/>
           <a:p xmlns:a="http://schemas.openxmlformats.org/drawingml/2006/main">
@@ -8998,7 +8998,7 @@
                 <a:ea typeface="宋体"/>
                 <a:cs typeface="宋体"/>
               </a:rPr>
-              <a:t>评价偏差</a:t>
+              <a:t>同一个人可能被看两次</a:t>
             </a:r>
           </a:p>
         </p:txBody>
@@ -9008,7 +9008,7 @@
           <p:cNvPr id="10" name="">
             <a:extLst xmlns:a="http://schemas.openxmlformats.org/drawingml/2006/main">
               <a:ext uri="{FF2B5EF4-FFF2-40B4-BE49-F238E27FC236}">
-                <a16:creationId xmlns:a16="http://schemas.microsoft.com/office/drawing/2014/main" id="{6B7DEE3C-D503-40C7-8394-5A4DCDBF9CBC}"/>
+                <a16:creationId xmlns:a16="http://schemas.microsoft.com/office/drawing/2014/main" id="{9052A83E-4C74-4A1D-B9EE-CC932B5C44A2}"/>
               </a:ext>
             </a:extLst>
           </p:cNvPr>
@@ -9055,7 +9055,7 @@
                 <a:ea typeface="宋体"/>
                 <a:cs typeface="宋体"/>
               </a:rPr>
-              <a:t>片段随机划分会造成被试泄漏，片段准确率也不能代替患者级性能。</a:t>
+              <a:t>如果同一人的部分片段用于训练，其他片段用于测试，模型可能记住这个人，成绩会虚高。</a:t>
             </a:r>
           </a:p>
         </p:txBody>
@@ -9065,7 +9065,7 @@
           <p:cNvPr id="11" name="">
             <a:extLst xmlns:a="http://schemas.openxmlformats.org/drawingml/2006/main">
               <a:ext uri="{FF2B5EF4-FFF2-40B4-BE49-F238E27FC236}">
-                <a16:creationId xmlns:a16="http://schemas.microsoft.com/office/drawing/2014/main" id="{642FC597-2251-4C16-83EF-4E4FF965043B}"/>
+                <a16:creationId xmlns:a16="http://schemas.microsoft.com/office/drawing/2014/main" id="{03A12CD6-21A3-44D9-A57E-E86D4BFEB9B7}"/>
               </a:ext>
             </a:extLst>
           </p:cNvPr>
@@ -9122,7 +9122,7 @@
           <p:cNvPr id="12" name="">
             <a:extLst xmlns:a="http://schemas.openxmlformats.org/drawingml/2006/main">
               <a:ext uri="{FF2B5EF4-FFF2-40B4-BE49-F238E27FC236}">
-                <a16:creationId xmlns:a16="http://schemas.microsoft.com/office/drawing/2014/main" id="{2748A521-DFB0-4B93-9610-15F368D6FFC0}"/>
+                <a16:creationId xmlns:a16="http://schemas.microsoft.com/office/drawing/2014/main" id="{8EECF537-5AC4-422A-9E62-7FD43539A187}"/>
               </a:ext>
             </a:extLst>
           </p:cNvPr>
@@ -9146,7 +9146,7 @@
         </p:spPr>
         <p:txBody>
           <a:bodyPr xmlns:a="http://schemas.openxmlformats.org/drawingml/2006/main" anchor="ctr">
-            <a:normAutofit fontScale="100000"/>
+            <a:normAutofit fontScale="87798"/>
           </a:bodyPr>
           <a:lstStyle xmlns:a="http://schemas.openxmlformats.org/drawingml/2006/main"/>
           <a:p xmlns:a="http://schemas.openxmlformats.org/drawingml/2006/main">
@@ -9169,7 +9169,7 @@
                 <a:ea typeface="宋体"/>
                 <a:cs typeface="宋体"/>
               </a:rPr>
-              <a:t>解释不稳定</a:t>
+              <a:t>片段分对不等于患者分对</a:t>
             </a:r>
           </a:p>
         </p:txBody>
@@ -9179,7 +9179,7 @@
           <p:cNvPr id="13" name="">
             <a:extLst xmlns:a="http://schemas.openxmlformats.org/drawingml/2006/main">
               <a:ext uri="{FF2B5EF4-FFF2-40B4-BE49-F238E27FC236}">
-                <a16:creationId xmlns:a16="http://schemas.microsoft.com/office/drawing/2014/main" id="{5EB9F45B-BA8E-4467-ABB1-CBD3ECE9D188}"/>
+                <a16:creationId xmlns:a16="http://schemas.microsoft.com/office/drawing/2014/main" id="{CA1BA211-3E4B-42A2-AD88-6215C04F9932}"/>
               </a:ext>
             </a:extLst>
           </p:cNvPr>
@@ -9226,7 +9226,7 @@
                 <a:ea typeface="宋体"/>
                 <a:cs typeface="宋体"/>
               </a:rPr>
-              <a:t>单次注意力或高准确率不足以证明某个频段、电极具有稳定贡献。</a:t>
+              <a:t>模型能分对很多短片段，不代表它能正确判断一名从未见过的新患者。</a:t>
             </a:r>
           </a:p>
         </p:txBody>
@@ -9236,7 +9236,7 @@
           <p:cNvPr id="14" name="">
             <a:extLst xmlns:a="http://schemas.openxmlformats.org/drawingml/2006/main">
               <a:ext uri="{FF2B5EF4-FFF2-40B4-BE49-F238E27FC236}">
-                <a16:creationId xmlns:a16="http://schemas.microsoft.com/office/drawing/2014/main" id="{4359AB70-D4D7-4A70-94AE-DA9CC18C6677}"/>
+                <a16:creationId xmlns:a16="http://schemas.microsoft.com/office/drawing/2014/main" id="{B003102D-003B-4767-B57D-C257570FE3C5}"/>
               </a:ext>
             </a:extLst>
           </p:cNvPr>
@@ -9266,7 +9266,7 @@
           <p:cNvPr id="15" name="">
             <a:extLst xmlns:a="http://schemas.openxmlformats.org/drawingml/2006/main">
               <a:ext uri="{FF2B5EF4-FFF2-40B4-BE49-F238E27FC236}">
-                <a16:creationId xmlns:a16="http://schemas.microsoft.com/office/drawing/2014/main" id="{3978BDB2-5C35-4ADD-823E-1783F4CB8670}"/>
+                <a16:creationId xmlns:a16="http://schemas.microsoft.com/office/drawing/2014/main" id="{B8F56CEF-DDF0-4F4C-B4B0-341589E2BE41}"/>
               </a:ext>
             </a:extLst>
           </p:cNvPr>
@@ -9278,7 +9278,7 @@
         <p:spPr>
           <a:xfrm xmlns:a="http://schemas.openxmlformats.org/drawingml/2006/main">
             <a:off x="590550" y="3905250"/>
-            <a:ext cx="2571750" cy="323850"/>
+            <a:ext cx="2857500" cy="323850"/>
           </a:xfrm>
           <a:prstGeom xmlns:a="http://schemas.openxmlformats.org/drawingml/2006/main" prst="rect">
             <a:avLst/>
@@ -9295,7 +9295,7 @@
           <a:lstStyle xmlns:a="http://schemas.openxmlformats.org/drawingml/2006/main"/>
           <a:p xmlns:a="http://schemas.openxmlformats.org/drawingml/2006/main">
             <a:pPr algn="l">
-              <a:defRPr sz="1500" b="1">
+              <a:defRPr sz="1425" b="1">
                 <a:solidFill>
                   <a:srgbClr val="2B8A72"/>
                 </a:solidFill>
@@ -9305,7 +9305,7 @@
               </a:defRPr>
             </a:pPr>
             <a:r>
-              <a:rPr sz="1500" b="1">
+              <a:rPr sz="1425" b="1">
                 <a:solidFill>
                   <a:srgbClr val="2B8A72"/>
                 </a:solidFill>
@@ -9313,7 +9313,7 @@
                 <a:ea typeface="宋体"/>
                 <a:cs typeface="宋体"/>
               </a:rPr>
-              <a:t>主评测场：公开数据集</a:t>
+              <a:t>主实验：按被试划分公开数据</a:t>
             </a:r>
           </a:p>
         </p:txBody>
@@ -9323,19 +9323,19 @@
           <p:cNvPr id="16" name="">
             <a:extLst xmlns:a="http://schemas.openxmlformats.org/drawingml/2006/main">
               <a:ext uri="{FF2B5EF4-FFF2-40B4-BE49-F238E27FC236}">
-                <a16:creationId xmlns:a16="http://schemas.microsoft.com/office/drawing/2014/main" id="{788854C0-D1D2-425E-B73F-F6AC690192F0}"/>
-              </a:ext>
-            </a:extLst>
-          </p:cNvPr>
-          <p:cNvSpPr>
-            <a:spLocks xmlns:a="http://schemas.openxmlformats.org/drawingml/2006/main" noGrp="1"/>
-          </p:cNvSpPr>
-          <p:nvPr/>
-        </p:nvSpPr>
-        <p:spPr>
-          <a:xfrm xmlns:a="http://schemas.openxmlformats.org/drawingml/2006/main">
-            <a:off x="3000375" y="3857625"/>
-            <a:ext cx="5429250" cy="457200"/>
+                <a16:creationId xmlns:a16="http://schemas.microsoft.com/office/drawing/2014/main" id="{D110F779-59F9-45B0-B256-B94D234674A0}"/>
+              </a:ext>
+            </a:extLst>
+          </p:cNvPr>
+          <p:cNvSpPr>
+            <a:spLocks xmlns:a="http://schemas.openxmlformats.org/drawingml/2006/main" noGrp="1"/>
+          </p:cNvSpPr>
+          <p:nvPr/>
+        </p:nvSpPr>
+        <p:spPr>
+          <a:xfrm xmlns:a="http://schemas.openxmlformats.org/drawingml/2006/main">
+            <a:off x="3286125" y="3857625"/>
+            <a:ext cx="5143500" cy="457200"/>
           </a:xfrm>
           <a:prstGeom xmlns:a="http://schemas.openxmlformats.org/drawingml/2006/main" prst="rect">
             <a:avLst/>
@@ -9370,7 +9370,7 @@
                 <a:ea typeface="宋体"/>
                 <a:cs typeface="宋体"/>
               </a:rPr>
-              <a:t>医院数据放在模型定型之后，仅用于外部验证，不参与模型选择和超参数调优。</a:t>
+              <a:t>医院数据等模型完成后再测试，只检查模型能否迁移，不用来选择模型或调整参数。</a:t>
             </a:r>
           </a:p>
         </p:txBody>
@@ -9380,7 +9380,7 @@
           <p:cNvPr id="17" name="">
             <a:extLst xmlns:a="http://schemas.openxmlformats.org/drawingml/2006/main">
               <a:ext uri="{FF2B5EF4-FFF2-40B4-BE49-F238E27FC236}">
-                <a16:creationId xmlns:a16="http://schemas.microsoft.com/office/drawing/2014/main" id="{E0B23BE3-6A66-4657-9F6E-E45DA5E0BBCE}"/>
+                <a16:creationId xmlns:a16="http://schemas.microsoft.com/office/drawing/2014/main" id="{F7F29455-FFA4-40F2-A71B-E48F333400F3}"/>
               </a:ext>
             </a:extLst>
           </p:cNvPr>
@@ -9410,7 +9410,7 @@
           <p:cNvPr id="18" name="">
             <a:extLst xmlns:a="http://schemas.openxmlformats.org/drawingml/2006/main">
               <a:ext uri="{FF2B5EF4-FFF2-40B4-BE49-F238E27FC236}">
-                <a16:creationId xmlns:a16="http://schemas.microsoft.com/office/drawing/2014/main" id="{9C78A58D-9447-45D3-9170-DAE410F04FFA}"/>
+                <a16:creationId xmlns:a16="http://schemas.microsoft.com/office/drawing/2014/main" id="{16659119-E534-4101-B124-A0A8A44B4AD6}"/>
               </a:ext>
             </a:extLst>
           </p:cNvPr>
@@ -9465,7 +9465,7 @@
     </p:spTree>
     <p:extLst>
       <p:ext uri="{BB962C8B-B14F-4D97-AF65-F5344CB8AC3E}">
-        <p14:creationId xmlns:p14="http://schemas.microsoft.com/office/powerpoint/2010/main" val="1364985596"/>
+        <p14:creationId xmlns:p14="http://schemas.microsoft.com/office/powerpoint/2010/main" val="1578176335"/>
       </p:ext>
     </p:extLst>
   </p:cSld>
@@ -9496,7 +9496,7 @@
           <p:cNvPr id="20" name="">
             <a:extLst xmlns:a="http://schemas.openxmlformats.org/drawingml/2006/main">
               <a:ext uri="{FF2B5EF4-FFF2-40B4-BE49-F238E27FC236}">
-                <a16:creationId xmlns:a16="http://schemas.microsoft.com/office/drawing/2014/main" id="{DFEB098D-B0A4-4CF1-AE54-A693F18C9112}"/>
+                <a16:creationId xmlns:a16="http://schemas.microsoft.com/office/drawing/2014/main" id="{2446A0D2-0686-4259-B30D-E7DD1245AAAF}"/>
               </a:ext>
             </a:extLst>
           </p:cNvPr>
@@ -9526,7 +9526,7 @@
           <p:cNvPr id="2" name="">
             <a:extLst xmlns:a="http://schemas.openxmlformats.org/drawingml/2006/main">
               <a:ext uri="{FF2B5EF4-FFF2-40B4-BE49-F238E27FC236}">
-                <a16:creationId xmlns:a16="http://schemas.microsoft.com/office/drawing/2014/main" id="{34760974-179C-4628-94D5-B3972B3CC957}"/>
+                <a16:creationId xmlns:a16="http://schemas.microsoft.com/office/drawing/2014/main" id="{9959D8AC-27B7-4925-964E-928B0AFA65A5}"/>
               </a:ext>
             </a:extLst>
           </p:cNvPr>
@@ -9556,7 +9556,7 @@
           <p:cNvPr id="3" name="">
             <a:extLst xmlns:a="http://schemas.openxmlformats.org/drawingml/2006/main">
               <a:ext uri="{FF2B5EF4-FFF2-40B4-BE49-F238E27FC236}">
-                <a16:creationId xmlns:a16="http://schemas.microsoft.com/office/drawing/2014/main" id="{1520AF1E-B946-42C3-BDAD-5C8F7F43A8E6}"/>
+                <a16:creationId xmlns:a16="http://schemas.microsoft.com/office/drawing/2014/main" id="{C415F36E-8FCA-4DBA-940B-49A847CD4A7D}"/>
               </a:ext>
             </a:extLst>
           </p:cNvPr>
@@ -9586,7 +9586,7 @@
           <p:cNvPr id="4" name="">
             <a:extLst xmlns:a="http://schemas.openxmlformats.org/drawingml/2006/main">
               <a:ext uri="{FF2B5EF4-FFF2-40B4-BE49-F238E27FC236}">
-                <a16:creationId xmlns:a16="http://schemas.microsoft.com/office/drawing/2014/main" id="{F71AE997-0787-4EC7-B04E-6EB2C39D7231}"/>
+                <a16:creationId xmlns:a16="http://schemas.microsoft.com/office/drawing/2014/main" id="{B3A513D6-39CE-41EA-A4D8-C4273E56C2B4}"/>
               </a:ext>
             </a:extLst>
           </p:cNvPr>
@@ -9643,7 +9643,7 @@
           <p:cNvPr id="5" name="">
             <a:extLst xmlns:a="http://schemas.openxmlformats.org/drawingml/2006/main">
               <a:ext uri="{FF2B5EF4-FFF2-40B4-BE49-F238E27FC236}">
-                <a16:creationId xmlns:a16="http://schemas.microsoft.com/office/drawing/2014/main" id="{7AAAC563-CDD0-42E7-B25C-81FD56CDB3BD}"/>
+                <a16:creationId xmlns:a16="http://schemas.microsoft.com/office/drawing/2014/main" id="{CB8E3303-0DED-4529-A5E0-164EE00AD24C}"/>
               </a:ext>
             </a:extLst>
           </p:cNvPr>
@@ -9700,7 +9700,7 @@
           <p:cNvPr id="6" name="">
             <a:extLst xmlns:a="http://schemas.openxmlformats.org/drawingml/2006/main">
               <a:ext uri="{FF2B5EF4-FFF2-40B4-BE49-F238E27FC236}">
-                <a16:creationId xmlns:a16="http://schemas.microsoft.com/office/drawing/2014/main" id="{233CD596-4C63-41D8-A696-90096A1C4FD4}"/>
+                <a16:creationId xmlns:a16="http://schemas.microsoft.com/office/drawing/2014/main" id="{86088402-5CF2-4979-8350-37E328FC77E9}"/>
               </a:ext>
             </a:extLst>
           </p:cNvPr>
@@ -9757,7 +9757,7 @@
           <p:cNvPr id="7" name="">
             <a:extLst xmlns:a="http://schemas.openxmlformats.org/drawingml/2006/main">
               <a:ext uri="{FF2B5EF4-FFF2-40B4-BE49-F238E27FC236}">
-                <a16:creationId xmlns:a16="http://schemas.microsoft.com/office/drawing/2014/main" id="{C171C193-DAC2-47BF-B215-4B2F36ADEB1B}"/>
+                <a16:creationId xmlns:a16="http://schemas.microsoft.com/office/drawing/2014/main" id="{10CBDA68-86F2-42B2-B91E-67546A0FA720}"/>
               </a:ext>
             </a:extLst>
           </p:cNvPr>
@@ -9814,7 +9814,7 @@
           <p:cNvPr id="8" name="">
             <a:extLst xmlns:a="http://schemas.openxmlformats.org/drawingml/2006/main">
               <a:ext uri="{FF2B5EF4-FFF2-40B4-BE49-F238E27FC236}">
-                <a16:creationId xmlns:a16="http://schemas.microsoft.com/office/drawing/2014/main" id="{A6A989CA-7629-41DE-A917-79866E2FB052}"/>
+                <a16:creationId xmlns:a16="http://schemas.microsoft.com/office/drawing/2014/main" id="{8C41DCBB-4D19-4B75-B47D-562EAF04EF69}"/>
               </a:ext>
             </a:extLst>
           </p:cNvPr>
@@ -9844,7 +9844,7 @@
           <p:cNvPr id="9" name="">
             <a:extLst xmlns:a="http://schemas.openxmlformats.org/drawingml/2006/main">
               <a:ext uri="{FF2B5EF4-FFF2-40B4-BE49-F238E27FC236}">
-                <a16:creationId xmlns:a16="http://schemas.microsoft.com/office/drawing/2014/main" id="{5B3664D6-6FC1-4B53-9488-31697F908FC3}"/>
+                <a16:creationId xmlns:a16="http://schemas.microsoft.com/office/drawing/2014/main" id="{2FF7D282-ED0E-4650-AFBB-889CFB183015}"/>
               </a:ext>
             </a:extLst>
           </p:cNvPr>
@@ -9901,7 +9901,7 @@
           <p:cNvPr id="10" name="">
             <a:extLst xmlns:a="http://schemas.openxmlformats.org/drawingml/2006/main">
               <a:ext uri="{FF2B5EF4-FFF2-40B4-BE49-F238E27FC236}">
-                <a16:creationId xmlns:a16="http://schemas.microsoft.com/office/drawing/2014/main" id="{28446DEE-4035-4C31-A99B-071C0FAD7F61}"/>
+                <a16:creationId xmlns:a16="http://schemas.microsoft.com/office/drawing/2014/main" id="{0FF53C2C-3D5D-452F-B63F-37405E192935}"/>
               </a:ext>
             </a:extLst>
           </p:cNvPr>
@@ -9958,7 +9958,7 @@
           <p:cNvPr id="11" name="">
             <a:extLst xmlns:a="http://schemas.openxmlformats.org/drawingml/2006/main">
               <a:ext uri="{FF2B5EF4-FFF2-40B4-BE49-F238E27FC236}">
-                <a16:creationId xmlns:a16="http://schemas.microsoft.com/office/drawing/2014/main" id="{C8A6400A-112C-4D59-BCFE-ABA393227626}"/>
+                <a16:creationId xmlns:a16="http://schemas.microsoft.com/office/drawing/2014/main" id="{FC57791A-7304-482D-9856-D8CFD2D0CB78}"/>
               </a:ext>
             </a:extLst>
           </p:cNvPr>
@@ -10015,7 +10015,7 @@
           <p:cNvPr id="12" name="">
             <a:extLst xmlns:a="http://schemas.openxmlformats.org/drawingml/2006/main">
               <a:ext uri="{FF2B5EF4-FFF2-40B4-BE49-F238E27FC236}">
-                <a16:creationId xmlns:a16="http://schemas.microsoft.com/office/drawing/2014/main" id="{32402E89-167D-469C-B681-0E9C8A3A523C}"/>
+                <a16:creationId xmlns:a16="http://schemas.microsoft.com/office/drawing/2014/main" id="{C87D2A15-AC88-4282-8534-5278AF987DD2}"/>
               </a:ext>
             </a:extLst>
           </p:cNvPr>
@@ -10072,7 +10072,7 @@
           <p:cNvPr id="13" name="">
             <a:extLst xmlns:a="http://schemas.openxmlformats.org/drawingml/2006/main">
               <a:ext uri="{FF2B5EF4-FFF2-40B4-BE49-F238E27FC236}">
-                <a16:creationId xmlns:a16="http://schemas.microsoft.com/office/drawing/2014/main" id="{EC304F1F-555D-445B-8A5E-AB9BFE462B2B}"/>
+                <a16:creationId xmlns:a16="http://schemas.microsoft.com/office/drawing/2014/main" id="{20A3858D-1C1B-4841-8E43-A2F4E3D4E05E}"/>
               </a:ext>
             </a:extLst>
           </p:cNvPr>
@@ -10129,7 +10129,7 @@
           <p:cNvPr id="14" name="">
             <a:extLst xmlns:a="http://schemas.openxmlformats.org/drawingml/2006/main">
               <a:ext uri="{FF2B5EF4-FFF2-40B4-BE49-F238E27FC236}">
-                <a16:creationId xmlns:a16="http://schemas.microsoft.com/office/drawing/2014/main" id="{02C1F2E1-F6C9-4013-AE1F-2EDE8376BEE0}"/>
+                <a16:creationId xmlns:a16="http://schemas.microsoft.com/office/drawing/2014/main" id="{97EC51A6-CEF8-44F3-8752-30661C4E385C}"/>
               </a:ext>
             </a:extLst>
           </p:cNvPr>
@@ -10186,7 +10186,7 @@
           <p:cNvPr id="15" name="">
             <a:extLst xmlns:a="http://schemas.openxmlformats.org/drawingml/2006/main">
               <a:ext uri="{FF2B5EF4-FFF2-40B4-BE49-F238E27FC236}">
-                <a16:creationId xmlns:a16="http://schemas.microsoft.com/office/drawing/2014/main" id="{633F770E-6B10-44E3-8EFB-455241C383B4}"/>
+                <a16:creationId xmlns:a16="http://schemas.microsoft.com/office/drawing/2014/main" id="{B5357064-5E36-4A5A-A401-7D85ADF5976E}"/>
               </a:ext>
             </a:extLst>
           </p:cNvPr>
@@ -10243,7 +10243,7 @@
           <p:cNvPr id="16" name="">
             <a:extLst xmlns:a="http://schemas.openxmlformats.org/drawingml/2006/main">
               <a:ext uri="{FF2B5EF4-FFF2-40B4-BE49-F238E27FC236}">
-                <a16:creationId xmlns:a16="http://schemas.microsoft.com/office/drawing/2014/main" id="{52D16A32-CB8D-4489-B233-CB8BD7A89322}"/>
+                <a16:creationId xmlns:a16="http://schemas.microsoft.com/office/drawing/2014/main" id="{3CE2C62F-9474-438C-8DE9-329F7B03EF3B}"/>
               </a:ext>
             </a:extLst>
           </p:cNvPr>
@@ -10300,7 +10300,7 @@
           <p:cNvPr id="17" name="">
             <a:extLst xmlns:a="http://schemas.openxmlformats.org/drawingml/2006/main">
               <a:ext uri="{FF2B5EF4-FFF2-40B4-BE49-F238E27FC236}">
-                <a16:creationId xmlns:a16="http://schemas.microsoft.com/office/drawing/2014/main" id="{34E67C38-810A-4C64-8BCA-73F2C6A60590}"/>
+                <a16:creationId xmlns:a16="http://schemas.microsoft.com/office/drawing/2014/main" id="{ED2C1E1E-2B65-45A8-B6D5-DAC5EEA9E0B8}"/>
               </a:ext>
             </a:extLst>
           </p:cNvPr>
@@ -10357,7 +10357,7 @@
           <p:cNvPr id="18" name="">
             <a:extLst xmlns:a="http://schemas.openxmlformats.org/drawingml/2006/main">
               <a:ext uri="{FF2B5EF4-FFF2-40B4-BE49-F238E27FC236}">
-                <a16:creationId xmlns:a16="http://schemas.microsoft.com/office/drawing/2014/main" id="{09951421-F44A-4512-844A-25A55B3D12BC}"/>
+                <a16:creationId xmlns:a16="http://schemas.microsoft.com/office/drawing/2014/main" id="{29FB2A20-0541-417C-8EED-FE795750C6A9}"/>
               </a:ext>
             </a:extLst>
           </p:cNvPr>
@@ -10387,7 +10387,7 @@
           <p:cNvPr id="19" name="">
             <a:extLst xmlns:a="http://schemas.openxmlformats.org/drawingml/2006/main">
               <a:ext uri="{FF2B5EF4-FFF2-40B4-BE49-F238E27FC236}">
-                <a16:creationId xmlns:a16="http://schemas.microsoft.com/office/drawing/2014/main" id="{3DC13B83-4F2B-47D9-A727-A636928E4E2A}"/>
+                <a16:creationId xmlns:a16="http://schemas.microsoft.com/office/drawing/2014/main" id="{4A0ACD7F-7754-42EE-9449-B079D37D88D9}"/>
               </a:ext>
             </a:extLst>
           </p:cNvPr>
@@ -10442,7 +10442,7 @@
     </p:spTree>
     <p:extLst>
       <p:ext uri="{BB962C8B-B14F-4D97-AF65-F5344CB8AC3E}">
-        <p14:creationId xmlns:p14="http://schemas.microsoft.com/office/powerpoint/2010/main" val="2009811323"/>
+        <p14:creationId xmlns:p14="http://schemas.microsoft.com/office/powerpoint/2010/main" val="1881906895"/>
       </p:ext>
     </p:extLst>
   </p:cSld>
@@ -10473,7 +10473,7 @@
           <p:cNvPr id="9" name="">
             <a:extLst xmlns:a="http://schemas.openxmlformats.org/drawingml/2006/main">
               <a:ext uri="{FF2B5EF4-FFF2-40B4-BE49-F238E27FC236}">
-                <a16:creationId xmlns:a16="http://schemas.microsoft.com/office/drawing/2014/main" id="{68489676-3856-48CE-BCCE-F23905F0AC0B}"/>
+                <a16:creationId xmlns:a16="http://schemas.microsoft.com/office/drawing/2014/main" id="{3D412E11-0773-4650-AE42-24DDAB0D6AF0}"/>
               </a:ext>
             </a:extLst>
           </p:cNvPr>
@@ -10503,7 +10503,7 @@
           <p:cNvPr id="2" name="">
             <a:extLst xmlns:a="http://schemas.openxmlformats.org/drawingml/2006/main">
               <a:ext uri="{FF2B5EF4-FFF2-40B4-BE49-F238E27FC236}">
-                <a16:creationId xmlns:a16="http://schemas.microsoft.com/office/drawing/2014/main" id="{526DE1AF-6C31-4FB1-8D1A-494F57FDA3B9}"/>
+                <a16:creationId xmlns:a16="http://schemas.microsoft.com/office/drawing/2014/main" id="{B8827BAC-43C8-4EF7-93B6-0A73FCA9A42D}"/>
               </a:ext>
             </a:extLst>
           </p:cNvPr>
@@ -10533,7 +10533,7 @@
           <p:cNvPr id="3" name="">
             <a:extLst xmlns:a="http://schemas.openxmlformats.org/drawingml/2006/main">
               <a:ext uri="{FF2B5EF4-FFF2-40B4-BE49-F238E27FC236}">
-                <a16:creationId xmlns:a16="http://schemas.microsoft.com/office/drawing/2014/main" id="{E8CCE1E7-485D-4C4E-9117-4661806C8FA7}"/>
+                <a16:creationId xmlns:a16="http://schemas.microsoft.com/office/drawing/2014/main" id="{145CD111-4D86-47D0-8756-FCE57BB76AB4}"/>
               </a:ext>
             </a:extLst>
           </p:cNvPr>
@@ -10563,7 +10563,7 @@
           <p:cNvPr id="4" name="">
             <a:extLst xmlns:a="http://schemas.openxmlformats.org/drawingml/2006/main">
               <a:ext uri="{FF2B5EF4-FFF2-40B4-BE49-F238E27FC236}">
-                <a16:creationId xmlns:a16="http://schemas.microsoft.com/office/drawing/2014/main" id="{10B3F235-94E1-40A4-8FCD-B64F516A6508}"/>
+                <a16:creationId xmlns:a16="http://schemas.microsoft.com/office/drawing/2014/main" id="{09BDF29A-C23E-46CA-9128-A8762C8A0121}"/>
               </a:ext>
             </a:extLst>
           </p:cNvPr>
@@ -11000,7 +11000,7 @@
           <p:cNvPr id="6" name="">
             <a:extLst xmlns:a="http://schemas.openxmlformats.org/drawingml/2006/main">
               <a:ext uri="{FF2B5EF4-FFF2-40B4-BE49-F238E27FC236}">
-                <a16:creationId xmlns:a16="http://schemas.microsoft.com/office/drawing/2014/main" id="{EEE2D481-E57F-4AC7-B932-E6D12DEE7528}"/>
+                <a16:creationId xmlns:a16="http://schemas.microsoft.com/office/drawing/2014/main" id="{9CDF4A0E-D7F6-48D1-82D1-9D36DDC9E3CE}"/>
               </a:ext>
             </a:extLst>
           </p:cNvPr>
@@ -11057,7 +11057,7 @@
           <p:cNvPr id="7" name="">
             <a:extLst xmlns:a="http://schemas.openxmlformats.org/drawingml/2006/main">
               <a:ext uri="{FF2B5EF4-FFF2-40B4-BE49-F238E27FC236}">
-                <a16:creationId xmlns:a16="http://schemas.microsoft.com/office/drawing/2014/main" id="{83BD5B53-F212-4FD0-AD0C-4E10ADF6219C}"/>
+                <a16:creationId xmlns:a16="http://schemas.microsoft.com/office/drawing/2014/main" id="{25C9773D-EDE5-44DD-9261-1FE794BFF9E9}"/>
               </a:ext>
             </a:extLst>
           </p:cNvPr>
@@ -11087,7 +11087,7 @@
           <p:cNvPr id="8" name="">
             <a:extLst xmlns:a="http://schemas.openxmlformats.org/drawingml/2006/main">
               <a:ext uri="{FF2B5EF4-FFF2-40B4-BE49-F238E27FC236}">
-                <a16:creationId xmlns:a16="http://schemas.microsoft.com/office/drawing/2014/main" id="{91CDDC8E-5ACF-44B4-940E-3027A567EB01}"/>
+                <a16:creationId xmlns:a16="http://schemas.microsoft.com/office/drawing/2014/main" id="{7E302663-435D-42C4-A6F2-A910806B1EB3}"/>
               </a:ext>
             </a:extLst>
           </p:cNvPr>
@@ -11142,7 +11142,7 @@
     </p:spTree>
     <p:extLst>
       <p:ext uri="{BB962C8B-B14F-4D97-AF65-F5344CB8AC3E}">
-        <p14:creationId xmlns:p14="http://schemas.microsoft.com/office/powerpoint/2010/main" val="2008943777"/>
+        <p14:creationId xmlns:p14="http://schemas.microsoft.com/office/powerpoint/2010/main" val="1799058057"/>
       </p:ext>
     </p:extLst>
   </p:cSld>
@@ -11173,7 +11173,7 @@
           <p:cNvPr id="20" name="">
             <a:extLst xmlns:a="http://schemas.openxmlformats.org/drawingml/2006/main">
               <a:ext uri="{FF2B5EF4-FFF2-40B4-BE49-F238E27FC236}">
-                <a16:creationId xmlns:a16="http://schemas.microsoft.com/office/drawing/2014/main" id="{1EB06C25-2636-4379-9258-2A83D0A7C492}"/>
+                <a16:creationId xmlns:a16="http://schemas.microsoft.com/office/drawing/2014/main" id="{3C30D053-9ACA-4791-AD0A-C15035482548}"/>
               </a:ext>
             </a:extLst>
           </p:cNvPr>
@@ -11203,7 +11203,7 @@
           <p:cNvPr id="2" name="">
             <a:extLst xmlns:a="http://schemas.openxmlformats.org/drawingml/2006/main">
               <a:ext uri="{FF2B5EF4-FFF2-40B4-BE49-F238E27FC236}">
-                <a16:creationId xmlns:a16="http://schemas.microsoft.com/office/drawing/2014/main" id="{8B1E466B-FE1E-4B44-A76E-9E4FD6D5D5D8}"/>
+                <a16:creationId xmlns:a16="http://schemas.microsoft.com/office/drawing/2014/main" id="{240E3F41-1503-4186-A69B-C2DF9E372A4C}"/>
               </a:ext>
             </a:extLst>
           </p:cNvPr>
@@ -11233,7 +11233,7 @@
           <p:cNvPr id="3" name="">
             <a:extLst xmlns:a="http://schemas.openxmlformats.org/drawingml/2006/main">
               <a:ext uri="{FF2B5EF4-FFF2-40B4-BE49-F238E27FC236}">
-                <a16:creationId xmlns:a16="http://schemas.microsoft.com/office/drawing/2014/main" id="{858AF2A1-E954-44CF-9205-0145C84F74C8}"/>
+                <a16:creationId xmlns:a16="http://schemas.microsoft.com/office/drawing/2014/main" id="{62B75FC0-8F44-40F1-8C96-CA0FC9AA14BC}"/>
               </a:ext>
             </a:extLst>
           </p:cNvPr>
@@ -11263,7 +11263,7 @@
           <p:cNvPr id="4" name="">
             <a:extLst xmlns:a="http://schemas.openxmlformats.org/drawingml/2006/main">
               <a:ext uri="{FF2B5EF4-FFF2-40B4-BE49-F238E27FC236}">
-                <a16:creationId xmlns:a16="http://schemas.microsoft.com/office/drawing/2014/main" id="{ED4313B7-DDB6-48B7-A8A4-86185C2B31E0}"/>
+                <a16:creationId xmlns:a16="http://schemas.microsoft.com/office/drawing/2014/main" id="{5775222E-2AFD-453A-AE57-7D8C510C6090}"/>
               </a:ext>
             </a:extLst>
           </p:cNvPr>
@@ -11320,7 +11320,7 @@
           <p:cNvPr id="5" name="">
             <a:extLst xmlns:a="http://schemas.openxmlformats.org/drawingml/2006/main">
               <a:ext uri="{FF2B5EF4-FFF2-40B4-BE49-F238E27FC236}">
-                <a16:creationId xmlns:a16="http://schemas.microsoft.com/office/drawing/2014/main" id="{E8F70DFF-9B45-4D28-B134-F57794BFB8CA}"/>
+                <a16:creationId xmlns:a16="http://schemas.microsoft.com/office/drawing/2014/main" id="{941AD6BB-AEBE-4AD5-8F8B-474C486184FA}"/>
               </a:ext>
             </a:extLst>
           </p:cNvPr>
@@ -11377,7 +11377,7 @@
           <p:cNvPr id="6" name="">
             <a:extLst xmlns:a="http://schemas.openxmlformats.org/drawingml/2006/main">
               <a:ext uri="{FF2B5EF4-FFF2-40B4-BE49-F238E27FC236}">
-                <a16:creationId xmlns:a16="http://schemas.microsoft.com/office/drawing/2014/main" id="{BC7BD051-A36D-42F5-9364-19892CC236DB}"/>
+                <a16:creationId xmlns:a16="http://schemas.microsoft.com/office/drawing/2014/main" id="{D81A8B8F-84B6-4002-97C6-520DF3C9E731}"/>
               </a:ext>
             </a:extLst>
           </p:cNvPr>
@@ -11434,7 +11434,7 @@
           <p:cNvPr id="7" name="">
             <a:extLst xmlns:a="http://schemas.openxmlformats.org/drawingml/2006/main">
               <a:ext uri="{FF2B5EF4-FFF2-40B4-BE49-F238E27FC236}">
-                <a16:creationId xmlns:a16="http://schemas.microsoft.com/office/drawing/2014/main" id="{B9AC1336-A25C-41E4-887B-5343A6D35364}"/>
+                <a16:creationId xmlns:a16="http://schemas.microsoft.com/office/drawing/2014/main" id="{5C75400E-5736-4922-A986-510F4AC350F2}"/>
               </a:ext>
             </a:extLst>
           </p:cNvPr>
@@ -11491,7 +11491,7 @@
           <p:cNvPr id="8" name="">
             <a:extLst xmlns:a="http://schemas.openxmlformats.org/drawingml/2006/main">
               <a:ext uri="{FF2B5EF4-FFF2-40B4-BE49-F238E27FC236}">
-                <a16:creationId xmlns:a16="http://schemas.microsoft.com/office/drawing/2014/main" id="{1E65D086-E2FD-4319-9A02-6D7A004AEB28}"/>
+                <a16:creationId xmlns:a16="http://schemas.microsoft.com/office/drawing/2014/main" id="{676F8796-6706-4FA8-A4D1-DD458F0B64B6}"/>
               </a:ext>
             </a:extLst>
           </p:cNvPr>
@@ -11548,7 +11548,7 @@
           <p:cNvPr id="9" name="">
             <a:extLst xmlns:a="http://schemas.openxmlformats.org/drawingml/2006/main">
               <a:ext uri="{FF2B5EF4-FFF2-40B4-BE49-F238E27FC236}">
-                <a16:creationId xmlns:a16="http://schemas.microsoft.com/office/drawing/2014/main" id="{0D4E19C8-7A70-4E1A-BCA3-67AF1E63C8CC}"/>
+                <a16:creationId xmlns:a16="http://schemas.microsoft.com/office/drawing/2014/main" id="{90E5EA65-63AB-4CC4-8CD6-E35BBA7E4DBC}"/>
               </a:ext>
             </a:extLst>
           </p:cNvPr>
@@ -11605,7 +11605,7 @@
           <p:cNvPr id="10" name="">
             <a:extLst xmlns:a="http://schemas.openxmlformats.org/drawingml/2006/main">
               <a:ext uri="{FF2B5EF4-FFF2-40B4-BE49-F238E27FC236}">
-                <a16:creationId xmlns:a16="http://schemas.microsoft.com/office/drawing/2014/main" id="{0CC9ED60-3BB4-4DF2-964C-1817C1211608}"/>
+                <a16:creationId xmlns:a16="http://schemas.microsoft.com/office/drawing/2014/main" id="{9DAE9C74-6424-4D67-BF20-D4B344F84A6C}"/>
               </a:ext>
             </a:extLst>
           </p:cNvPr>
@@ -11662,7 +11662,7 @@
           <p:cNvPr id="11" name="">
             <a:extLst xmlns:a="http://schemas.openxmlformats.org/drawingml/2006/main">
               <a:ext uri="{FF2B5EF4-FFF2-40B4-BE49-F238E27FC236}">
-                <a16:creationId xmlns:a16="http://schemas.microsoft.com/office/drawing/2014/main" id="{760F065A-57CD-4B18-90A6-B2FFBE2AC649}"/>
+                <a16:creationId xmlns:a16="http://schemas.microsoft.com/office/drawing/2014/main" id="{16C0BDB8-A149-4602-92AA-B15867DEE3D1}"/>
               </a:ext>
             </a:extLst>
           </p:cNvPr>
@@ -11692,7 +11692,7 @@
           <p:cNvPr id="12" name="">
             <a:extLst xmlns:a="http://schemas.openxmlformats.org/drawingml/2006/main">
               <a:ext uri="{FF2B5EF4-FFF2-40B4-BE49-F238E27FC236}">
-                <a16:creationId xmlns:a16="http://schemas.microsoft.com/office/drawing/2014/main" id="{1817D278-EE15-4FED-8AD5-EE39E1CF5E4C}"/>
+                <a16:creationId xmlns:a16="http://schemas.microsoft.com/office/drawing/2014/main" id="{62FBADAE-FF00-44DA-8005-F4B15EB65954}"/>
               </a:ext>
             </a:extLst>
           </p:cNvPr>
@@ -11749,7 +11749,7 @@
           <p:cNvPr id="13" name="">
             <a:extLst xmlns:a="http://schemas.openxmlformats.org/drawingml/2006/main">
               <a:ext uri="{FF2B5EF4-FFF2-40B4-BE49-F238E27FC236}">
-                <a16:creationId xmlns:a16="http://schemas.microsoft.com/office/drawing/2014/main" id="{B5562082-A433-4ECC-B1BE-7CA18241BA4E}"/>
+                <a16:creationId xmlns:a16="http://schemas.microsoft.com/office/drawing/2014/main" id="{A08A8CA1-ECDE-4D86-8910-D3AF56B1AFF5}"/>
               </a:ext>
             </a:extLst>
           </p:cNvPr>
@@ -11806,7 +11806,7 @@
           <p:cNvPr id="14" name="">
             <a:extLst xmlns:a="http://schemas.openxmlformats.org/drawingml/2006/main">
               <a:ext uri="{FF2B5EF4-FFF2-40B4-BE49-F238E27FC236}">
-                <a16:creationId xmlns:a16="http://schemas.microsoft.com/office/drawing/2014/main" id="{F6745239-1054-4AC6-A903-555B95A3C9A8}"/>
+                <a16:creationId xmlns:a16="http://schemas.microsoft.com/office/drawing/2014/main" id="{2C4A7D44-1EDA-4342-9AB3-AFB224E32AB5}"/>
               </a:ext>
             </a:extLst>
           </p:cNvPr>
@@ -11863,7 +11863,7 @@
           <p:cNvPr id="15" name="">
             <a:extLst xmlns:a="http://schemas.openxmlformats.org/drawingml/2006/main">
               <a:ext uri="{FF2B5EF4-FFF2-40B4-BE49-F238E27FC236}">
-                <a16:creationId xmlns:a16="http://schemas.microsoft.com/office/drawing/2014/main" id="{6899497E-65D8-441B-8350-5FD16A6E89CF}"/>
+                <a16:creationId xmlns:a16="http://schemas.microsoft.com/office/drawing/2014/main" id="{F99707BF-16CD-47DB-AA5A-36546432CCB4}"/>
               </a:ext>
             </a:extLst>
           </p:cNvPr>
@@ -11920,7 +11920,7 @@
           <p:cNvPr id="16" name="">
             <a:extLst xmlns:a="http://schemas.openxmlformats.org/drawingml/2006/main">
               <a:ext uri="{FF2B5EF4-FFF2-40B4-BE49-F238E27FC236}">
-                <a16:creationId xmlns:a16="http://schemas.microsoft.com/office/drawing/2014/main" id="{2857E192-262C-46C6-AB21-D467FA691A3A}"/>
+                <a16:creationId xmlns:a16="http://schemas.microsoft.com/office/drawing/2014/main" id="{98D3455F-DC7E-49A8-8A21-BB8CBD246DD2}"/>
               </a:ext>
             </a:extLst>
           </p:cNvPr>
@@ -11977,7 +11977,7 @@
           <p:cNvPr id="17" name="">
             <a:extLst xmlns:a="http://schemas.openxmlformats.org/drawingml/2006/main">
               <a:ext uri="{FF2B5EF4-FFF2-40B4-BE49-F238E27FC236}">
-                <a16:creationId xmlns:a16="http://schemas.microsoft.com/office/drawing/2014/main" id="{CF08E8F1-8250-444E-A900-FF6D9E025CEA}"/>
+                <a16:creationId xmlns:a16="http://schemas.microsoft.com/office/drawing/2014/main" id="{5A414707-1470-4936-9AD4-363A91FD26F5}"/>
               </a:ext>
             </a:extLst>
           </p:cNvPr>
@@ -12034,7 +12034,7 @@
           <p:cNvPr id="18" name="">
             <a:extLst xmlns:a="http://schemas.openxmlformats.org/drawingml/2006/main">
               <a:ext uri="{FF2B5EF4-FFF2-40B4-BE49-F238E27FC236}">
-                <a16:creationId xmlns:a16="http://schemas.microsoft.com/office/drawing/2014/main" id="{E5316737-FDD7-4772-9494-38698C284450}"/>
+                <a16:creationId xmlns:a16="http://schemas.microsoft.com/office/drawing/2014/main" id="{3AC97245-2CCA-4714-8AFC-48E34BA8EA49}"/>
               </a:ext>
             </a:extLst>
           </p:cNvPr>
@@ -12064,7 +12064,7 @@
           <p:cNvPr id="19" name="">
             <a:extLst xmlns:a="http://schemas.openxmlformats.org/drawingml/2006/main">
               <a:ext uri="{FF2B5EF4-FFF2-40B4-BE49-F238E27FC236}">
-                <a16:creationId xmlns:a16="http://schemas.microsoft.com/office/drawing/2014/main" id="{6EF196EB-5406-4FCE-8A7D-9676C7CE01F1}"/>
+                <a16:creationId xmlns:a16="http://schemas.microsoft.com/office/drawing/2014/main" id="{EE0BD6F8-5470-4F98-9C11-C136F5D1F5DF}"/>
               </a:ext>
             </a:extLst>
           </p:cNvPr>
@@ -12119,7 +12119,7 @@
     </p:spTree>
     <p:extLst>
       <p:ext uri="{BB962C8B-B14F-4D97-AF65-F5344CB8AC3E}">
-        <p14:creationId xmlns:p14="http://schemas.microsoft.com/office/powerpoint/2010/main" val="1144654472"/>
+        <p14:creationId xmlns:p14="http://schemas.microsoft.com/office/powerpoint/2010/main" val="1731190263"/>
       </p:ext>
     </p:extLst>
   </p:cSld>
@@ -12150,7 +12150,7 @@
           <p:cNvPr id="24" name="">
             <a:extLst xmlns:a="http://schemas.openxmlformats.org/drawingml/2006/main">
               <a:ext uri="{FF2B5EF4-FFF2-40B4-BE49-F238E27FC236}">
-                <a16:creationId xmlns:a16="http://schemas.microsoft.com/office/drawing/2014/main" id="{EAEEC57D-887B-4884-B0F4-6CC4445B392C}"/>
+                <a16:creationId xmlns:a16="http://schemas.microsoft.com/office/drawing/2014/main" id="{16C32166-C38D-431F-9CD6-17E8D823C04F}"/>
               </a:ext>
             </a:extLst>
           </p:cNvPr>
@@ -12180,7 +12180,7 @@
           <p:cNvPr id="2" name="">
             <a:extLst xmlns:a="http://schemas.openxmlformats.org/drawingml/2006/main">
               <a:ext uri="{FF2B5EF4-FFF2-40B4-BE49-F238E27FC236}">
-                <a16:creationId xmlns:a16="http://schemas.microsoft.com/office/drawing/2014/main" id="{1029B5DD-B38B-419E-848D-B15E9461B366}"/>
+                <a16:creationId xmlns:a16="http://schemas.microsoft.com/office/drawing/2014/main" id="{FE5D625B-CABA-4832-98EF-97C4FF696D53}"/>
               </a:ext>
             </a:extLst>
           </p:cNvPr>
@@ -12210,7 +12210,7 @@
           <p:cNvPr id="3" name="">
             <a:extLst xmlns:a="http://schemas.openxmlformats.org/drawingml/2006/main">
               <a:ext uri="{FF2B5EF4-FFF2-40B4-BE49-F238E27FC236}">
-                <a16:creationId xmlns:a16="http://schemas.microsoft.com/office/drawing/2014/main" id="{790B1694-CBBC-4302-98DA-4FE41D4B37ED}"/>
+                <a16:creationId xmlns:a16="http://schemas.microsoft.com/office/drawing/2014/main" id="{04623F5C-8A48-4332-8D8D-91F77C28103A}"/>
               </a:ext>
             </a:extLst>
           </p:cNvPr>
@@ -12240,7 +12240,7 @@
           <p:cNvPr id="4" name="">
             <a:extLst xmlns:a="http://schemas.openxmlformats.org/drawingml/2006/main">
               <a:ext uri="{FF2B5EF4-FFF2-40B4-BE49-F238E27FC236}">
-                <a16:creationId xmlns:a16="http://schemas.microsoft.com/office/drawing/2014/main" id="{6610662D-2F24-45C2-AE64-FE8C34D36B32}"/>
+                <a16:creationId xmlns:a16="http://schemas.microsoft.com/office/drawing/2014/main" id="{E40CE5D4-4030-4EA3-BFE5-B117B442ABEF}"/>
               </a:ext>
             </a:extLst>
           </p:cNvPr>
@@ -12297,7 +12297,7 @@
           <p:cNvPr id="5" name="">
             <a:extLst xmlns:a="http://schemas.openxmlformats.org/drawingml/2006/main">
               <a:ext uri="{FF2B5EF4-FFF2-40B4-BE49-F238E27FC236}">
-                <a16:creationId xmlns:a16="http://schemas.microsoft.com/office/drawing/2014/main" id="{535885B3-B0D4-4E4C-AC9B-4BB2F73E72E5}"/>
+                <a16:creationId xmlns:a16="http://schemas.microsoft.com/office/drawing/2014/main" id="{494292D3-D1B0-4E88-B616-25DE01478F52}"/>
               </a:ext>
             </a:extLst>
           </p:cNvPr>
@@ -12354,7 +12354,7 @@
           <p:cNvPr id="6" name="">
             <a:extLst xmlns:a="http://schemas.openxmlformats.org/drawingml/2006/main">
               <a:ext uri="{FF2B5EF4-FFF2-40B4-BE49-F238E27FC236}">
-                <a16:creationId xmlns:a16="http://schemas.microsoft.com/office/drawing/2014/main" id="{70951231-A924-4CE7-92D9-758BDCB844C3}"/>
+                <a16:creationId xmlns:a16="http://schemas.microsoft.com/office/drawing/2014/main" id="{7B0A2E79-F5CF-4C57-AF24-EB1CA2B9F633}"/>
               </a:ext>
             </a:extLst>
           </p:cNvPr>
@@ -12411,7 +12411,7 @@
           <p:cNvPr id="7" name="">
             <a:extLst xmlns:a="http://schemas.openxmlformats.org/drawingml/2006/main">
               <a:ext uri="{FF2B5EF4-FFF2-40B4-BE49-F238E27FC236}">
-                <a16:creationId xmlns:a16="http://schemas.microsoft.com/office/drawing/2014/main" id="{1355E963-D6C7-4982-8004-A8DBFBC58515}"/>
+                <a16:creationId xmlns:a16="http://schemas.microsoft.com/office/drawing/2014/main" id="{7B9BDF80-DE53-4749-B8A4-68264B357703}"/>
               </a:ext>
             </a:extLst>
           </p:cNvPr>
@@ -12468,7 +12468,7 @@
           <p:cNvPr id="8" name="">
             <a:extLst xmlns:a="http://schemas.openxmlformats.org/drawingml/2006/main">
               <a:ext uri="{FF2B5EF4-FFF2-40B4-BE49-F238E27FC236}">
-                <a16:creationId xmlns:a16="http://schemas.microsoft.com/office/drawing/2014/main" id="{3B224F78-5A62-45E4-93B8-DCE16FC0D1CE}"/>
+                <a16:creationId xmlns:a16="http://schemas.microsoft.com/office/drawing/2014/main" id="{DE197C01-C33F-4DA4-B235-47EEAD9CABD1}"/>
               </a:ext>
             </a:extLst>
           </p:cNvPr>
@@ -12525,7 +12525,7 @@
           <p:cNvPr id="9" name="">
             <a:extLst xmlns:a="http://schemas.openxmlformats.org/drawingml/2006/main">
               <a:ext uri="{FF2B5EF4-FFF2-40B4-BE49-F238E27FC236}">
-                <a16:creationId xmlns:a16="http://schemas.microsoft.com/office/drawing/2014/main" id="{924453BD-E3DD-4C1D-8D0E-F909F57DCDB3}"/>
+                <a16:creationId xmlns:a16="http://schemas.microsoft.com/office/drawing/2014/main" id="{78C85D2A-1B35-48F5-91E9-9B9D02D2A31D}"/>
               </a:ext>
             </a:extLst>
           </p:cNvPr>
@@ -12582,7 +12582,7 @@
           <p:cNvPr id="10" name="">
             <a:extLst xmlns:a="http://schemas.openxmlformats.org/drawingml/2006/main">
               <a:ext uri="{FF2B5EF4-FFF2-40B4-BE49-F238E27FC236}">
-                <a16:creationId xmlns:a16="http://schemas.microsoft.com/office/drawing/2014/main" id="{6AE7CDCE-F92A-42AC-92B2-A14C13D12443}"/>
+                <a16:creationId xmlns:a16="http://schemas.microsoft.com/office/drawing/2014/main" id="{3DE309BF-F609-4939-BD48-C2AC910D2066}"/>
               </a:ext>
             </a:extLst>
           </p:cNvPr>
@@ -12639,7 +12639,7 @@
           <p:cNvPr id="11" name="">
             <a:extLst xmlns:a="http://schemas.openxmlformats.org/drawingml/2006/main">
               <a:ext uri="{FF2B5EF4-FFF2-40B4-BE49-F238E27FC236}">
-                <a16:creationId xmlns:a16="http://schemas.microsoft.com/office/drawing/2014/main" id="{B2B0D8B2-41B8-4D26-AE30-2F7BA5AA9095}"/>
+                <a16:creationId xmlns:a16="http://schemas.microsoft.com/office/drawing/2014/main" id="{7DD44AEA-C231-41F0-B526-8901C3AD265C}"/>
               </a:ext>
             </a:extLst>
           </p:cNvPr>
@@ -12669,7 +12669,7 @@
           <p:cNvPr id="12" name="">
             <a:extLst xmlns:a="http://schemas.openxmlformats.org/drawingml/2006/main">
               <a:ext uri="{FF2B5EF4-FFF2-40B4-BE49-F238E27FC236}">
-                <a16:creationId xmlns:a16="http://schemas.microsoft.com/office/drawing/2014/main" id="{AD404FB4-AAA7-44E9-B725-10869168DA60}"/>
+                <a16:creationId xmlns:a16="http://schemas.microsoft.com/office/drawing/2014/main" id="{58B90F6A-57A7-45CB-AC59-69882CA5E488}"/>
               </a:ext>
             </a:extLst>
           </p:cNvPr>
@@ -12726,7 +12726,7 @@
           <p:cNvPr id="13" name="">
             <a:extLst xmlns:a="http://schemas.openxmlformats.org/drawingml/2006/main">
               <a:ext uri="{FF2B5EF4-FFF2-40B4-BE49-F238E27FC236}">
-                <a16:creationId xmlns:a16="http://schemas.microsoft.com/office/drawing/2014/main" id="{CAE2CD59-1024-46DB-AA6D-18693EB58A0D}"/>
+                <a16:creationId xmlns:a16="http://schemas.microsoft.com/office/drawing/2014/main" id="{12569869-724B-44AD-AED0-3A6279131ECC}"/>
               </a:ext>
             </a:extLst>
           </p:cNvPr>
@@ -12783,7 +12783,7 @@
           <p:cNvPr id="14" name="">
             <a:extLst xmlns:a="http://schemas.openxmlformats.org/drawingml/2006/main">
               <a:ext uri="{FF2B5EF4-FFF2-40B4-BE49-F238E27FC236}">
-                <a16:creationId xmlns:a16="http://schemas.microsoft.com/office/drawing/2014/main" id="{38847A79-C95A-4340-A7CE-A90C403C2B08}"/>
+                <a16:creationId xmlns:a16="http://schemas.microsoft.com/office/drawing/2014/main" id="{9729F6D9-8384-4BDA-9B85-C797DE6BF848}"/>
               </a:ext>
             </a:extLst>
           </p:cNvPr>
@@ -12840,7 +12840,7 @@
           <p:cNvPr id="15" name="">
             <a:extLst xmlns:a="http://schemas.openxmlformats.org/drawingml/2006/main">
               <a:ext uri="{FF2B5EF4-FFF2-40B4-BE49-F238E27FC236}">
-                <a16:creationId xmlns:a16="http://schemas.microsoft.com/office/drawing/2014/main" id="{73D77022-C2F0-48FC-B8D9-194F23AEFED8}"/>
+                <a16:creationId xmlns:a16="http://schemas.microsoft.com/office/drawing/2014/main" id="{14ACD3BA-125D-4F49-9CC7-F980973A482B}"/>
               </a:ext>
             </a:extLst>
           </p:cNvPr>
@@ -12897,7 +12897,7 @@
           <p:cNvPr id="16" name="">
             <a:extLst xmlns:a="http://schemas.openxmlformats.org/drawingml/2006/main">
               <a:ext uri="{FF2B5EF4-FFF2-40B4-BE49-F238E27FC236}">
-                <a16:creationId xmlns:a16="http://schemas.microsoft.com/office/drawing/2014/main" id="{93570916-9EDB-42EE-A9D3-2D5278DB3417}"/>
+                <a16:creationId xmlns:a16="http://schemas.microsoft.com/office/drawing/2014/main" id="{E6E58FA0-32E6-42F8-AF2E-123144DC9F1F}"/>
               </a:ext>
             </a:extLst>
           </p:cNvPr>
@@ -12927,7 +12927,7 @@
           <p:cNvPr id="17" name="">
             <a:extLst xmlns:a="http://schemas.openxmlformats.org/drawingml/2006/main">
               <a:ext uri="{FF2B5EF4-FFF2-40B4-BE49-F238E27FC236}">
-                <a16:creationId xmlns:a16="http://schemas.microsoft.com/office/drawing/2014/main" id="{B0940C28-5786-441E-82E8-F812D0899522}"/>
+                <a16:creationId xmlns:a16="http://schemas.microsoft.com/office/drawing/2014/main" id="{2464C09C-4284-44F5-BC10-D7DD95ED320D}"/>
               </a:ext>
             </a:extLst>
           </p:cNvPr>
@@ -12984,7 +12984,7 @@
           <p:cNvPr id="18" name="">
             <a:extLst xmlns:a="http://schemas.openxmlformats.org/drawingml/2006/main">
               <a:ext uri="{FF2B5EF4-FFF2-40B4-BE49-F238E27FC236}">
-                <a16:creationId xmlns:a16="http://schemas.microsoft.com/office/drawing/2014/main" id="{9E2F4B65-F6AA-4D9E-A01C-89A13AACDC19}"/>
+                <a16:creationId xmlns:a16="http://schemas.microsoft.com/office/drawing/2014/main" id="{6C1C66E1-E5F8-4814-81C3-C63C95A5B73C}"/>
               </a:ext>
             </a:extLst>
           </p:cNvPr>
@@ -13041,7 +13041,7 @@
           <p:cNvPr id="19" name="">
             <a:extLst xmlns:a="http://schemas.openxmlformats.org/drawingml/2006/main">
               <a:ext uri="{FF2B5EF4-FFF2-40B4-BE49-F238E27FC236}">
-                <a16:creationId xmlns:a16="http://schemas.microsoft.com/office/drawing/2014/main" id="{3F1051F3-5E85-4581-A32D-6ABABCD7603A}"/>
+                <a16:creationId xmlns:a16="http://schemas.microsoft.com/office/drawing/2014/main" id="{D15BDE8D-AA30-4676-9875-0F2E5105999A}"/>
               </a:ext>
             </a:extLst>
           </p:cNvPr>
@@ -13098,7 +13098,7 @@
           <p:cNvPr id="20" name="">
             <a:extLst xmlns:a="http://schemas.openxmlformats.org/drawingml/2006/main">
               <a:ext uri="{FF2B5EF4-FFF2-40B4-BE49-F238E27FC236}">
-                <a16:creationId xmlns:a16="http://schemas.microsoft.com/office/drawing/2014/main" id="{7742D690-2A37-4338-9C78-0BBFA47EC872}"/>
+                <a16:creationId xmlns:a16="http://schemas.microsoft.com/office/drawing/2014/main" id="{642C9884-38BC-48AF-AC18-D833EB5B95F7}"/>
               </a:ext>
             </a:extLst>
           </p:cNvPr>
@@ -13155,7 +13155,7 @@
           <p:cNvPr id="21" name="">
             <a:extLst xmlns:a="http://schemas.openxmlformats.org/drawingml/2006/main">
               <a:ext uri="{FF2B5EF4-FFF2-40B4-BE49-F238E27FC236}">
-                <a16:creationId xmlns:a16="http://schemas.microsoft.com/office/drawing/2014/main" id="{0B2E034D-C3D2-42B8-AA47-60F4E2D0F74A}"/>
+                <a16:creationId xmlns:a16="http://schemas.microsoft.com/office/drawing/2014/main" id="{FBC60B4A-8AA2-4A3A-ABB0-0FACEC3A63F6}"/>
               </a:ext>
             </a:extLst>
           </p:cNvPr>
@@ -13212,7 +13212,7 @@
           <p:cNvPr id="22" name="">
             <a:extLst xmlns:a="http://schemas.openxmlformats.org/drawingml/2006/main">
               <a:ext uri="{FF2B5EF4-FFF2-40B4-BE49-F238E27FC236}">
-                <a16:creationId xmlns:a16="http://schemas.microsoft.com/office/drawing/2014/main" id="{926D75BE-1C90-468C-865B-BA287F5D0708}"/>
+                <a16:creationId xmlns:a16="http://schemas.microsoft.com/office/drawing/2014/main" id="{5252305B-CDB4-4DC2-BE6C-065D40F2CCE6}"/>
               </a:ext>
             </a:extLst>
           </p:cNvPr>
@@ -13242,7 +13242,7 @@
           <p:cNvPr id="23" name="">
             <a:extLst xmlns:a="http://schemas.openxmlformats.org/drawingml/2006/main">
               <a:ext uri="{FF2B5EF4-FFF2-40B4-BE49-F238E27FC236}">
-                <a16:creationId xmlns:a16="http://schemas.microsoft.com/office/drawing/2014/main" id="{68A2B6B8-243A-43AE-9E7D-5F094EDB2593}"/>
+                <a16:creationId xmlns:a16="http://schemas.microsoft.com/office/drawing/2014/main" id="{7C1D6F3B-CC9D-423F-80F6-9D4ECC362371}"/>
               </a:ext>
             </a:extLst>
           </p:cNvPr>
@@ -13297,7 +13297,7 @@
     </p:spTree>
     <p:extLst>
       <p:ext uri="{BB962C8B-B14F-4D97-AF65-F5344CB8AC3E}">
-        <p14:creationId xmlns:p14="http://schemas.microsoft.com/office/powerpoint/2010/main" val="1544208350"/>
+        <p14:creationId xmlns:p14="http://schemas.microsoft.com/office/powerpoint/2010/main" val="1122943645"/>
       </p:ext>
     </p:extLst>
   </p:cSld>
@@ -13328,7 +13328,7 @@
           <p:cNvPr id="13" name="">
             <a:extLst xmlns:a="http://schemas.openxmlformats.org/drawingml/2006/main">
               <a:ext uri="{FF2B5EF4-FFF2-40B4-BE49-F238E27FC236}">
-                <a16:creationId xmlns:a16="http://schemas.microsoft.com/office/drawing/2014/main" id="{0CB8D854-6F78-464D-9335-244CC7FD7D50}"/>
+                <a16:creationId xmlns:a16="http://schemas.microsoft.com/office/drawing/2014/main" id="{A270996F-FAF8-40EC-A445-9EA3AF509F46}"/>
               </a:ext>
             </a:extLst>
           </p:cNvPr>
@@ -13358,7 +13358,7 @@
           <p:cNvPr id="2" name="">
             <a:extLst xmlns:a="http://schemas.openxmlformats.org/drawingml/2006/main">
               <a:ext uri="{FF2B5EF4-FFF2-40B4-BE49-F238E27FC236}">
-                <a16:creationId xmlns:a16="http://schemas.microsoft.com/office/drawing/2014/main" id="{B5A29027-8CF7-45FF-B237-0B047387E715}"/>
+                <a16:creationId xmlns:a16="http://schemas.microsoft.com/office/drawing/2014/main" id="{4BE1CBD7-A57D-4D18-9C59-D95327A13E08}"/>
               </a:ext>
             </a:extLst>
           </p:cNvPr>
@@ -13388,7 +13388,7 @@
           <p:cNvPr id="3" name="">
             <a:extLst xmlns:a="http://schemas.openxmlformats.org/drawingml/2006/main">
               <a:ext uri="{FF2B5EF4-FFF2-40B4-BE49-F238E27FC236}">
-                <a16:creationId xmlns:a16="http://schemas.microsoft.com/office/drawing/2014/main" id="{372BF2E0-F2DF-4CC7-8D0E-6904C7E44445}"/>
+                <a16:creationId xmlns:a16="http://schemas.microsoft.com/office/drawing/2014/main" id="{61A1F945-0EF4-4A25-B2BF-C34267245EFF}"/>
               </a:ext>
             </a:extLst>
           </p:cNvPr>
@@ -13418,7 +13418,7 @@
           <p:cNvPr id="4" name="">
             <a:extLst xmlns:a="http://schemas.openxmlformats.org/drawingml/2006/main">
               <a:ext uri="{FF2B5EF4-FFF2-40B4-BE49-F238E27FC236}">
-                <a16:creationId xmlns:a16="http://schemas.microsoft.com/office/drawing/2014/main" id="{9E10518C-662A-47C1-A6CA-35E16BFCDA43}"/>
+                <a16:creationId xmlns:a16="http://schemas.microsoft.com/office/drawing/2014/main" id="{F6FB6B89-A18D-4A7C-88C3-8AA3252634CE}"/>
               </a:ext>
             </a:extLst>
           </p:cNvPr>
@@ -13479,7 +13479,7 @@
           <p:nvPr/>
         </p:nvPicPr>
         <p:blipFill>
-          <a:blip xmlns:r="http://schemas.openxmlformats.org/officeDocument/2006/relationships" xmlns:a="http://schemas.openxmlformats.org/drawingml/2006/main" r:embed="Re4f6fe7dc8254aac"/>
+          <a:blip xmlns:r="http://schemas.openxmlformats.org/officeDocument/2006/relationships" xmlns:a="http://schemas.openxmlformats.org/drawingml/2006/main" r:embed="R4a89a85828b440f9"/>
           <a:stretch xmlns:a="http://schemas.openxmlformats.org/drawingml/2006/main"/>
         </p:blipFill>
         <p:spPr>
@@ -13497,7 +13497,7 @@
           <p:cNvPr id="6" name="">
             <a:extLst xmlns:a="http://schemas.openxmlformats.org/drawingml/2006/main">
               <a:ext uri="{FF2B5EF4-FFF2-40B4-BE49-F238E27FC236}">
-                <a16:creationId xmlns:a16="http://schemas.microsoft.com/office/drawing/2014/main" id="{C25EBA45-5F43-4287-88A1-A192E0229866}"/>
+                <a16:creationId xmlns:a16="http://schemas.microsoft.com/office/drawing/2014/main" id="{DEC4623B-905D-4F37-9C3B-9EED0F630023}"/>
               </a:ext>
             </a:extLst>
           </p:cNvPr>
@@ -13527,7 +13527,7 @@
           <p:cNvPr id="7" name="">
             <a:extLst xmlns:a="http://schemas.openxmlformats.org/drawingml/2006/main">
               <a:ext uri="{FF2B5EF4-FFF2-40B4-BE49-F238E27FC236}">
-                <a16:creationId xmlns:a16="http://schemas.microsoft.com/office/drawing/2014/main" id="{C9B41A1F-4E47-4228-92F1-B4B30B7D34AD}"/>
+                <a16:creationId xmlns:a16="http://schemas.microsoft.com/office/drawing/2014/main" id="{F1DC7013-6220-4FEA-B20B-51B5C5477324}"/>
               </a:ext>
             </a:extLst>
           </p:cNvPr>
@@ -13584,7 +13584,7 @@
           <p:cNvPr id="8" name="">
             <a:extLst xmlns:a="http://schemas.openxmlformats.org/drawingml/2006/main">
               <a:ext uri="{FF2B5EF4-FFF2-40B4-BE49-F238E27FC236}">
-                <a16:creationId xmlns:a16="http://schemas.microsoft.com/office/drawing/2014/main" id="{A8203693-C223-472E-A697-883A48C6146D}"/>
+                <a16:creationId xmlns:a16="http://schemas.microsoft.com/office/drawing/2014/main" id="{BE428C1D-F68F-4BDD-82AF-6B9CB3BBD0F8}"/>
               </a:ext>
             </a:extLst>
           </p:cNvPr>
@@ -13699,7 +13699,7 @@
           <p:cNvPr id="9" name="">
             <a:extLst xmlns:a="http://schemas.openxmlformats.org/drawingml/2006/main">
               <a:ext uri="{FF2B5EF4-FFF2-40B4-BE49-F238E27FC236}">
-                <a16:creationId xmlns:a16="http://schemas.microsoft.com/office/drawing/2014/main" id="{02DB1802-EC44-42FA-A774-1357763CA913}"/>
+                <a16:creationId xmlns:a16="http://schemas.microsoft.com/office/drawing/2014/main" id="{DB66F593-A420-43EC-BAB7-675F708F4F38}"/>
               </a:ext>
             </a:extLst>
           </p:cNvPr>
@@ -13756,7 +13756,7 @@
           <p:cNvPr id="10" name="">
             <a:extLst xmlns:a="http://schemas.openxmlformats.org/drawingml/2006/main">
               <a:ext uri="{FF2B5EF4-FFF2-40B4-BE49-F238E27FC236}">
-                <a16:creationId xmlns:a16="http://schemas.microsoft.com/office/drawing/2014/main" id="{A143FF6B-513F-4546-A680-4B24826CB55A}"/>
+                <a16:creationId xmlns:a16="http://schemas.microsoft.com/office/drawing/2014/main" id="{9B7E0D3D-A75B-465C-A94D-539641192D6F}"/>
               </a:ext>
             </a:extLst>
           </p:cNvPr>
@@ -13871,7 +13871,7 @@
           <p:cNvPr id="11" name="">
             <a:extLst xmlns:a="http://schemas.openxmlformats.org/drawingml/2006/main">
               <a:ext uri="{FF2B5EF4-FFF2-40B4-BE49-F238E27FC236}">
-                <a16:creationId xmlns:a16="http://schemas.microsoft.com/office/drawing/2014/main" id="{0A440D90-CA1F-4856-855D-E2AA308ED0AA}"/>
+                <a16:creationId xmlns:a16="http://schemas.microsoft.com/office/drawing/2014/main" id="{2717DF35-E363-41FE-8E12-69DDA5DC8E24}"/>
               </a:ext>
             </a:extLst>
           </p:cNvPr>
@@ -13901,7 +13901,7 @@
           <p:cNvPr id="12" name="">
             <a:extLst xmlns:a="http://schemas.openxmlformats.org/drawingml/2006/main">
               <a:ext uri="{FF2B5EF4-FFF2-40B4-BE49-F238E27FC236}">
-                <a16:creationId xmlns:a16="http://schemas.microsoft.com/office/drawing/2014/main" id="{0024DC87-6C68-4FEC-A066-B6CA31CE0FD7}"/>
+                <a16:creationId xmlns:a16="http://schemas.microsoft.com/office/drawing/2014/main" id="{D2AC54E0-4AF9-4034-9EE1-D9FD4E6201FA}"/>
               </a:ext>
             </a:extLst>
           </p:cNvPr>
@@ -13956,7 +13956,7 @@
     </p:spTree>
     <p:extLst>
       <p:ext uri="{BB962C8B-B14F-4D97-AF65-F5344CB8AC3E}">
-        <p14:creationId xmlns:p14="http://schemas.microsoft.com/office/powerpoint/2010/main" val="2046293954"/>
+        <p14:creationId xmlns:p14="http://schemas.microsoft.com/office/powerpoint/2010/main" val="376375143"/>
       </p:ext>
     </p:extLst>
   </p:cSld>
